--- a/usource_home/기획안.pptx
+++ b/usource_home/기획안.pptx
@@ -6,8 +6,9 @@
   </p:sldMasterIdLst>
   <p:sldIdLst>
     <p:sldId id="257" r:id="rId2"/>
-    <p:sldId id="258" r:id="rId3"/>
-    <p:sldId id="259" r:id="rId4"/>
+    <p:sldId id="260" r:id="rId3"/>
+    <p:sldId id="258" r:id="rId4"/>
+    <p:sldId id="259" r:id="rId5"/>
   </p:sldIdLst>
   <p:sldSz cx="10691813" cy="7559675"/>
   <p:notesSz cx="6858000" cy="9144000"/>
@@ -245,7 +246,7 @@
           <a:p>
             <a:fld id="{0C18B20E-7489-41F6-B3EF-D69EA7A7F97B}" type="datetimeFigureOut">
               <a:rPr lang="ko-KR" altLang="en-US" smtClean="0"/>
-              <a:t>2025-07-05</a:t>
+              <a:t>2025-07-08</a:t>
             </a:fld>
             <a:endParaRPr lang="ko-KR" altLang="en-US"/>
           </a:p>
@@ -415,7 +416,7 @@
           <a:p>
             <a:fld id="{0C18B20E-7489-41F6-B3EF-D69EA7A7F97B}" type="datetimeFigureOut">
               <a:rPr lang="ko-KR" altLang="en-US" smtClean="0"/>
-              <a:t>2025-07-05</a:t>
+              <a:t>2025-07-08</a:t>
             </a:fld>
             <a:endParaRPr lang="ko-KR" altLang="en-US"/>
           </a:p>
@@ -595,7 +596,7 @@
           <a:p>
             <a:fld id="{0C18B20E-7489-41F6-B3EF-D69EA7A7F97B}" type="datetimeFigureOut">
               <a:rPr lang="ko-KR" altLang="en-US" smtClean="0"/>
-              <a:t>2025-07-05</a:t>
+              <a:t>2025-07-08</a:t>
             </a:fld>
             <a:endParaRPr lang="ko-KR" altLang="en-US"/>
           </a:p>
@@ -765,7 +766,7 @@
           <a:p>
             <a:fld id="{0C18B20E-7489-41F6-B3EF-D69EA7A7F97B}" type="datetimeFigureOut">
               <a:rPr lang="ko-KR" altLang="en-US" smtClean="0"/>
-              <a:t>2025-07-05</a:t>
+              <a:t>2025-07-08</a:t>
             </a:fld>
             <a:endParaRPr lang="ko-KR" altLang="en-US"/>
           </a:p>
@@ -1011,7 +1012,7 @@
           <a:p>
             <a:fld id="{0C18B20E-7489-41F6-B3EF-D69EA7A7F97B}" type="datetimeFigureOut">
               <a:rPr lang="ko-KR" altLang="en-US" smtClean="0"/>
-              <a:t>2025-07-05</a:t>
+              <a:t>2025-07-08</a:t>
             </a:fld>
             <a:endParaRPr lang="ko-KR" altLang="en-US"/>
           </a:p>
@@ -1243,7 +1244,7 @@
           <a:p>
             <a:fld id="{0C18B20E-7489-41F6-B3EF-D69EA7A7F97B}" type="datetimeFigureOut">
               <a:rPr lang="ko-KR" altLang="en-US" smtClean="0"/>
-              <a:t>2025-07-05</a:t>
+              <a:t>2025-07-08</a:t>
             </a:fld>
             <a:endParaRPr lang="ko-KR" altLang="en-US"/>
           </a:p>
@@ -1610,7 +1611,7 @@
           <a:p>
             <a:fld id="{0C18B20E-7489-41F6-B3EF-D69EA7A7F97B}" type="datetimeFigureOut">
               <a:rPr lang="ko-KR" altLang="en-US" smtClean="0"/>
-              <a:t>2025-07-05</a:t>
+              <a:t>2025-07-08</a:t>
             </a:fld>
             <a:endParaRPr lang="ko-KR" altLang="en-US"/>
           </a:p>
@@ -1728,7 +1729,7 @@
           <a:p>
             <a:fld id="{0C18B20E-7489-41F6-B3EF-D69EA7A7F97B}" type="datetimeFigureOut">
               <a:rPr lang="ko-KR" altLang="en-US" smtClean="0"/>
-              <a:t>2025-07-05</a:t>
+              <a:t>2025-07-08</a:t>
             </a:fld>
             <a:endParaRPr lang="ko-KR" altLang="en-US"/>
           </a:p>
@@ -1823,7 +1824,7 @@
           <a:p>
             <a:fld id="{0C18B20E-7489-41F6-B3EF-D69EA7A7F97B}" type="datetimeFigureOut">
               <a:rPr lang="ko-KR" altLang="en-US" smtClean="0"/>
-              <a:t>2025-07-05</a:t>
+              <a:t>2025-07-08</a:t>
             </a:fld>
             <a:endParaRPr lang="ko-KR" altLang="en-US"/>
           </a:p>
@@ -2100,7 +2101,7 @@
           <a:p>
             <a:fld id="{0C18B20E-7489-41F6-B3EF-D69EA7A7F97B}" type="datetimeFigureOut">
               <a:rPr lang="ko-KR" altLang="en-US" smtClean="0"/>
-              <a:t>2025-07-05</a:t>
+              <a:t>2025-07-08</a:t>
             </a:fld>
             <a:endParaRPr lang="ko-KR" altLang="en-US"/>
           </a:p>
@@ -2357,7 +2358,7 @@
           <a:p>
             <a:fld id="{0C18B20E-7489-41F6-B3EF-D69EA7A7F97B}" type="datetimeFigureOut">
               <a:rPr lang="ko-KR" altLang="en-US" smtClean="0"/>
-              <a:t>2025-07-05</a:t>
+              <a:t>2025-07-08</a:t>
             </a:fld>
             <a:endParaRPr lang="ko-KR" altLang="en-US"/>
           </a:p>
@@ -2570,7 +2571,7 @@
           <a:p>
             <a:fld id="{0C18B20E-7489-41F6-B3EF-D69EA7A7F97B}" type="datetimeFigureOut">
               <a:rPr lang="ko-KR" altLang="en-US" smtClean="0"/>
-              <a:t>2025-07-05</a:t>
+              <a:t>2025-07-08</a:t>
             </a:fld>
             <a:endParaRPr lang="ko-KR" altLang="en-US"/>
           </a:p>
@@ -3326,100 +3327,6 @@
           <a:chExt cx="0" cy="0"/>
         </a:xfrm>
       </p:grpSpPr>
-      <p:pic>
-        <p:nvPicPr>
-          <p:cNvPr id="1028" name="Picture 4" descr="패턴) 주황색 사선 훈제연어 샐러드">
-            <a:extLst>
-              <a:ext uri="{FF2B5EF4-FFF2-40B4-BE49-F238E27FC236}">
-                <a16:creationId xmlns:a16="http://schemas.microsoft.com/office/drawing/2014/main" id="{D0C7C905-8609-86A6-77B0-2392449A2105}"/>
-              </a:ext>
-            </a:extLst>
-          </p:cNvPr>
-          <p:cNvPicPr>
-            <a:picLocks noChangeAspect="1" noChangeArrowheads="1"/>
-          </p:cNvPicPr>
-          <p:nvPr/>
-        </p:nvPicPr>
-        <p:blipFill>
-          <a:blip r:embed="rId2">
-            <a:extLst>
-              <a:ext uri="{28A0092B-C50C-407E-A947-70E740481C1C}">
-                <a14:useLocalDpi xmlns:a14="http://schemas.microsoft.com/office/drawing/2010/main" val="0"/>
-              </a:ext>
-            </a:extLst>
-          </a:blip>
-          <a:srcRect/>
-          <a:stretch>
-            <a:fillRect/>
-          </a:stretch>
-        </p:blipFill>
-        <p:spPr bwMode="auto">
-          <a:xfrm>
-            <a:off x="-1999038" y="9660444"/>
-            <a:ext cx="9144000" cy="6858000"/>
-          </a:xfrm>
-          <a:prstGeom prst="rect">
-            <a:avLst/>
-          </a:prstGeom>
-          <a:noFill/>
-          <a:extLst>
-            <a:ext uri="{909E8E84-426E-40DD-AFC4-6F175D3DCCD1}">
-              <a14:hiddenFill xmlns:a14="http://schemas.microsoft.com/office/drawing/2010/main">
-                <a:solidFill>
-                  <a:srgbClr val="FFFFFF"/>
-                </a:solidFill>
-              </a14:hiddenFill>
-            </a:ext>
-          </a:extLst>
-        </p:spPr>
-      </p:pic>
-      <p:pic>
-        <p:nvPicPr>
-          <p:cNvPr id="1030" name="Picture 6" descr="패턴) 주황색연어돋보기">
-            <a:extLst>
-              <a:ext uri="{FF2B5EF4-FFF2-40B4-BE49-F238E27FC236}">
-                <a16:creationId xmlns:a16="http://schemas.microsoft.com/office/drawing/2014/main" id="{B641680D-5185-8DF4-7045-D7E63B463AC1}"/>
-              </a:ext>
-            </a:extLst>
-          </p:cNvPr>
-          <p:cNvPicPr>
-            <a:picLocks noChangeAspect="1" noChangeArrowheads="1"/>
-          </p:cNvPicPr>
-          <p:nvPr/>
-        </p:nvPicPr>
-        <p:blipFill>
-          <a:blip r:embed="rId3">
-            <a:extLst>
-              <a:ext uri="{28A0092B-C50C-407E-A947-70E740481C1C}">
-                <a14:useLocalDpi xmlns:a14="http://schemas.microsoft.com/office/drawing/2010/main" val="0"/>
-              </a:ext>
-            </a:extLst>
-          </a:blip>
-          <a:srcRect/>
-          <a:stretch>
-            <a:fillRect/>
-          </a:stretch>
-        </p:blipFill>
-        <p:spPr bwMode="auto">
-          <a:xfrm>
-            <a:off x="-10866437" y="6967104"/>
-            <a:ext cx="9144000" cy="6858000"/>
-          </a:xfrm>
-          <a:prstGeom prst="rect">
-            <a:avLst/>
-          </a:prstGeom>
-          <a:noFill/>
-          <a:extLst>
-            <a:ext uri="{909E8E84-426E-40DD-AFC4-6F175D3DCCD1}">
-              <a14:hiddenFill xmlns:a14="http://schemas.microsoft.com/office/drawing/2010/main">
-                <a:solidFill>
-                  <a:srgbClr val="FFFFFF"/>
-                </a:solidFill>
-              </a14:hiddenFill>
-            </a:ext>
-          </a:extLst>
-        </p:spPr>
-      </p:pic>
       <p:sp>
         <p:nvSpPr>
           <p:cNvPr id="3" name="직사각형 2">
@@ -3806,7 +3713,7 @@
             <p:nvPr/>
           </p:nvPicPr>
           <p:blipFill>
-            <a:blip r:embed="rId4">
+            <a:blip r:embed="rId2">
               <a:extLst>
                 <a:ext uri="{28A0092B-C50C-407E-A947-70E740481C1C}">
                   <a14:useLocalDpi xmlns:a14="http://schemas.microsoft.com/office/drawing/2010/main" val="0"/>
@@ -4099,53 +4006,6 @@
           </a:p>
         </p:txBody>
       </p:sp>
-      <p:pic>
-        <p:nvPicPr>
-          <p:cNvPr id="4" name="Picture 2" descr="생성된 이미지">
-            <a:extLst>
-              <a:ext uri="{FF2B5EF4-FFF2-40B4-BE49-F238E27FC236}">
-                <a16:creationId xmlns:a16="http://schemas.microsoft.com/office/drawing/2014/main" id="{013B114F-11E1-9EF6-9E1D-D3FE04B7C8B9}"/>
-              </a:ext>
-            </a:extLst>
-          </p:cNvPr>
-          <p:cNvPicPr>
-            <a:picLocks noChangeAspect="1" noChangeArrowheads="1"/>
-          </p:cNvPicPr>
-          <p:nvPr/>
-        </p:nvPicPr>
-        <p:blipFill>
-          <a:blip r:embed="rId5">
-            <a:extLst>
-              <a:ext uri="{28A0092B-C50C-407E-A947-70E740481C1C}">
-                <a14:useLocalDpi xmlns:a14="http://schemas.microsoft.com/office/drawing/2010/main" val="0"/>
-              </a:ext>
-            </a:extLst>
-          </a:blip>
-          <a:srcRect/>
-          <a:stretch>
-            <a:fillRect/>
-          </a:stretch>
-        </p:blipFill>
-        <p:spPr bwMode="auto">
-          <a:xfrm>
-            <a:off x="-12171006" y="-4974556"/>
-            <a:ext cx="10691813" cy="7127875"/>
-          </a:xfrm>
-          <a:prstGeom prst="rect">
-            <a:avLst/>
-          </a:prstGeom>
-          <a:noFill/>
-          <a:extLst>
-            <a:ext uri="{909E8E84-426E-40DD-AFC4-6F175D3DCCD1}">
-              <a14:hiddenFill xmlns:a14="http://schemas.microsoft.com/office/drawing/2010/main">
-                <a:solidFill>
-                  <a:srgbClr val="FFFFFF"/>
-                </a:solidFill>
-              </a14:hiddenFill>
-            </a:ext>
-          </a:extLst>
-        </p:spPr>
-      </p:pic>
       <p:sp>
         <p:nvSpPr>
           <p:cNvPr id="10" name="TextBox 9">
@@ -4243,6 +4103,2028 @@
 </file>
 
 <file path=ppt/slides/slide2.xml><?xml version="1.0" encoding="utf-8"?>
+<p:sld xmlns:a="http://schemas.openxmlformats.org/drawingml/2006/main" xmlns:r="http://schemas.openxmlformats.org/officeDocument/2006/relationships" xmlns:p="http://schemas.openxmlformats.org/presentationml/2006/main">
+  <p:cSld>
+    <p:spTree>
+      <p:nvGrpSpPr>
+        <p:cNvPr id="1" name=""/>
+        <p:cNvGrpSpPr/>
+        <p:nvPr/>
+      </p:nvGrpSpPr>
+      <p:grpSpPr>
+        <a:xfrm>
+          <a:off x="0" y="0"/>
+          <a:ext cx="0" cy="0"/>
+          <a:chOff x="0" y="0"/>
+          <a:chExt cx="0" cy="0"/>
+        </a:xfrm>
+      </p:grpSpPr>
+      <p:sp>
+        <p:nvSpPr>
+          <p:cNvPr id="45" name="직사각형 44">
+            <a:extLst>
+              <a:ext uri="{FF2B5EF4-FFF2-40B4-BE49-F238E27FC236}">
+                <a16:creationId xmlns:a16="http://schemas.microsoft.com/office/drawing/2014/main" id="{6F32F731-A92C-0F01-37B9-0CCAF912B1F7}"/>
+              </a:ext>
+            </a:extLst>
+          </p:cNvPr>
+          <p:cNvSpPr/>
+          <p:nvPr/>
+        </p:nvSpPr>
+        <p:spPr>
+          <a:xfrm>
+            <a:off x="10794999" y="1667435"/>
+            <a:ext cx="5011057" cy="2856519"/>
+          </a:xfrm>
+          <a:prstGeom prst="rect">
+            <a:avLst/>
+          </a:prstGeom>
+          <a:solidFill>
+            <a:schemeClr val="bg1"/>
+          </a:solidFill>
+          <a:ln>
+            <a:noFill/>
+          </a:ln>
+        </p:spPr>
+        <p:style>
+          <a:lnRef idx="2">
+            <a:schemeClr val="accent1">
+              <a:shade val="15000"/>
+            </a:schemeClr>
+          </a:lnRef>
+          <a:fillRef idx="1">
+            <a:schemeClr val="accent1"/>
+          </a:fillRef>
+          <a:effectRef idx="0">
+            <a:schemeClr val="accent1"/>
+          </a:effectRef>
+          <a:fontRef idx="minor">
+            <a:schemeClr val="lt1"/>
+          </a:fontRef>
+        </p:style>
+        <p:txBody>
+          <a:bodyPr rtlCol="0" anchor="ctr"/>
+          <a:lstStyle/>
+          <a:p>
+            <a:pPr algn="ctr"/>
+            <a:endParaRPr lang="ko-KR" altLang="en-US"/>
+          </a:p>
+        </p:txBody>
+      </p:sp>
+      <p:pic>
+        <p:nvPicPr>
+          <p:cNvPr id="1026" name="Picture 2">
+            <a:extLst>
+              <a:ext uri="{FF2B5EF4-FFF2-40B4-BE49-F238E27FC236}">
+                <a16:creationId xmlns:a16="http://schemas.microsoft.com/office/drawing/2014/main" id="{249CD6C9-4040-A1CC-2E68-E971CA53774C}"/>
+              </a:ext>
+            </a:extLst>
+          </p:cNvPr>
+          <p:cNvPicPr>
+            <a:picLocks noChangeAspect="1" noChangeArrowheads="1"/>
+          </p:cNvPicPr>
+          <p:nvPr/>
+        </p:nvPicPr>
+        <p:blipFill>
+          <a:blip r:embed="rId2">
+            <a:extLst>
+              <a:ext uri="{28A0092B-C50C-407E-A947-70E740481C1C}">
+                <a14:useLocalDpi xmlns:a14="http://schemas.microsoft.com/office/drawing/2010/main" val="0"/>
+              </a:ext>
+            </a:extLst>
+          </a:blip>
+          <a:srcRect/>
+          <a:stretch>
+            <a:fillRect/>
+          </a:stretch>
+        </p:blipFill>
+        <p:spPr bwMode="auto">
+          <a:xfrm>
+            <a:off x="-1" y="215898"/>
+            <a:ext cx="10691813" cy="7127875"/>
+          </a:xfrm>
+          <a:prstGeom prst="rect">
+            <a:avLst/>
+          </a:prstGeom>
+          <a:noFill/>
+          <a:extLst>
+            <a:ext uri="{909E8E84-426E-40DD-AFC4-6F175D3DCCD1}">
+              <a14:hiddenFill xmlns:a14="http://schemas.microsoft.com/office/drawing/2010/main">
+                <a:solidFill>
+                  <a:srgbClr val="FFFFFF"/>
+                </a:solidFill>
+              </a14:hiddenFill>
+            </a:ext>
+          </a:extLst>
+        </p:spPr>
+      </p:pic>
+      <p:grpSp>
+        <p:nvGrpSpPr>
+          <p:cNvPr id="18" name="그룹 17">
+            <a:extLst>
+              <a:ext uri="{FF2B5EF4-FFF2-40B4-BE49-F238E27FC236}">
+                <a16:creationId xmlns:a16="http://schemas.microsoft.com/office/drawing/2014/main" id="{4B17EF52-286E-4A01-5BFE-5D416C8B8110}"/>
+              </a:ext>
+            </a:extLst>
+          </p:cNvPr>
+          <p:cNvGrpSpPr/>
+          <p:nvPr/>
+        </p:nvGrpSpPr>
+        <p:grpSpPr>
+          <a:xfrm>
+            <a:off x="11057199" y="2166706"/>
+            <a:ext cx="1690341" cy="2193524"/>
+            <a:chOff x="2644215" y="2711693"/>
+            <a:chExt cx="1690341" cy="2193524"/>
+          </a:xfrm>
+        </p:grpSpPr>
+        <p:sp>
+          <p:nvSpPr>
+            <p:cNvPr id="2" name="사각형: 둥근 위쪽 모서리 1">
+              <a:extLst>
+                <a:ext uri="{FF2B5EF4-FFF2-40B4-BE49-F238E27FC236}">
+                  <a16:creationId xmlns:a16="http://schemas.microsoft.com/office/drawing/2014/main" id="{8C6F2B7B-EC15-C332-6DCF-570E72922A96}"/>
+                </a:ext>
+              </a:extLst>
+            </p:cNvPr>
+            <p:cNvSpPr/>
+            <p:nvPr/>
+          </p:nvSpPr>
+          <p:spPr>
+            <a:xfrm rot="5400000">
+              <a:off x="2459121" y="2896787"/>
+              <a:ext cx="2060529" cy="1690341"/>
+            </a:xfrm>
+            <a:custGeom>
+              <a:avLst/>
+              <a:gdLst>
+                <a:gd name="connsiteX0" fmla="*/ 845171 w 2057162"/>
+                <a:gd name="connsiteY0" fmla="*/ 0 h 1690341"/>
+                <a:gd name="connsiteX1" fmla="*/ 1211992 w 2057162"/>
+                <a:gd name="connsiteY1" fmla="*/ 0 h 1690341"/>
+                <a:gd name="connsiteX2" fmla="*/ 2057163 w 2057162"/>
+                <a:gd name="connsiteY2" fmla="*/ 845171 h 1690341"/>
+                <a:gd name="connsiteX3" fmla="*/ 2057162 w 2057162"/>
+                <a:gd name="connsiteY3" fmla="*/ 1690341 h 1690341"/>
+                <a:gd name="connsiteX4" fmla="*/ 2057162 w 2057162"/>
+                <a:gd name="connsiteY4" fmla="*/ 1690341 h 1690341"/>
+                <a:gd name="connsiteX5" fmla="*/ 0 w 2057162"/>
+                <a:gd name="connsiteY5" fmla="*/ 1690341 h 1690341"/>
+                <a:gd name="connsiteX6" fmla="*/ 0 w 2057162"/>
+                <a:gd name="connsiteY6" fmla="*/ 1690341 h 1690341"/>
+                <a:gd name="connsiteX7" fmla="*/ 0 w 2057162"/>
+                <a:gd name="connsiteY7" fmla="*/ 845171 h 1690341"/>
+                <a:gd name="connsiteX8" fmla="*/ 845171 w 2057162"/>
+                <a:gd name="connsiteY8" fmla="*/ 0 h 1690341"/>
+                <a:gd name="connsiteX0" fmla="*/ 845171 w 2057163"/>
+                <a:gd name="connsiteY0" fmla="*/ 0 h 1690341"/>
+                <a:gd name="connsiteX1" fmla="*/ 1211992 w 2057163"/>
+                <a:gd name="connsiteY1" fmla="*/ 0 h 1690341"/>
+                <a:gd name="connsiteX2" fmla="*/ 2057163 w 2057163"/>
+                <a:gd name="connsiteY2" fmla="*/ 845171 h 1690341"/>
+                <a:gd name="connsiteX3" fmla="*/ 2057162 w 2057163"/>
+                <a:gd name="connsiteY3" fmla="*/ 1690341 h 1690341"/>
+                <a:gd name="connsiteX4" fmla="*/ 2057162 w 2057163"/>
+                <a:gd name="connsiteY4" fmla="*/ 1690341 h 1690341"/>
+                <a:gd name="connsiteX5" fmla="*/ 0 w 2057163"/>
+                <a:gd name="connsiteY5" fmla="*/ 1690341 h 1690341"/>
+                <a:gd name="connsiteX6" fmla="*/ 0 w 2057163"/>
+                <a:gd name="connsiteY6" fmla="*/ 1690341 h 1690341"/>
+                <a:gd name="connsiteX7" fmla="*/ 0 w 2057163"/>
+                <a:gd name="connsiteY7" fmla="*/ 845171 h 1690341"/>
+                <a:gd name="connsiteX8" fmla="*/ 845171 w 2057163"/>
+                <a:gd name="connsiteY8" fmla="*/ 0 h 1690341"/>
+                <a:gd name="connsiteX0" fmla="*/ 845171 w 2057163"/>
+                <a:gd name="connsiteY0" fmla="*/ 105646 h 1795987"/>
+                <a:gd name="connsiteX1" fmla="*/ 1211992 w 2057163"/>
+                <a:gd name="connsiteY1" fmla="*/ 105646 h 1795987"/>
+                <a:gd name="connsiteX2" fmla="*/ 2057163 w 2057163"/>
+                <a:gd name="connsiteY2" fmla="*/ 950817 h 1795987"/>
+                <a:gd name="connsiteX3" fmla="*/ 2057162 w 2057163"/>
+                <a:gd name="connsiteY3" fmla="*/ 1795987 h 1795987"/>
+                <a:gd name="connsiteX4" fmla="*/ 2057162 w 2057163"/>
+                <a:gd name="connsiteY4" fmla="*/ 1795987 h 1795987"/>
+                <a:gd name="connsiteX5" fmla="*/ 0 w 2057163"/>
+                <a:gd name="connsiteY5" fmla="*/ 1795987 h 1795987"/>
+                <a:gd name="connsiteX6" fmla="*/ 0 w 2057163"/>
+                <a:gd name="connsiteY6" fmla="*/ 1795987 h 1795987"/>
+                <a:gd name="connsiteX7" fmla="*/ 0 w 2057163"/>
+                <a:gd name="connsiteY7" fmla="*/ 950817 h 1795987"/>
+                <a:gd name="connsiteX8" fmla="*/ 845171 w 2057163"/>
+                <a:gd name="connsiteY8" fmla="*/ 105646 h 1795987"/>
+                <a:gd name="connsiteX0" fmla="*/ 845171 w 2146940"/>
+                <a:gd name="connsiteY0" fmla="*/ 0 h 1690341"/>
+                <a:gd name="connsiteX1" fmla="*/ 2057163 w 2146940"/>
+                <a:gd name="connsiteY1" fmla="*/ 845171 h 1690341"/>
+                <a:gd name="connsiteX2" fmla="*/ 2057162 w 2146940"/>
+                <a:gd name="connsiteY2" fmla="*/ 1690341 h 1690341"/>
+                <a:gd name="connsiteX3" fmla="*/ 2057162 w 2146940"/>
+                <a:gd name="connsiteY3" fmla="*/ 1690341 h 1690341"/>
+                <a:gd name="connsiteX4" fmla="*/ 0 w 2146940"/>
+                <a:gd name="connsiteY4" fmla="*/ 1690341 h 1690341"/>
+                <a:gd name="connsiteX5" fmla="*/ 0 w 2146940"/>
+                <a:gd name="connsiteY5" fmla="*/ 1690341 h 1690341"/>
+                <a:gd name="connsiteX6" fmla="*/ 0 w 2146940"/>
+                <a:gd name="connsiteY6" fmla="*/ 845171 h 1690341"/>
+                <a:gd name="connsiteX7" fmla="*/ 845171 w 2146940"/>
+                <a:gd name="connsiteY7" fmla="*/ 0 h 1690341"/>
+                <a:gd name="connsiteX0" fmla="*/ 845171 w 2057162"/>
+                <a:gd name="connsiteY0" fmla="*/ 0 h 1690341"/>
+                <a:gd name="connsiteX1" fmla="*/ 1828565 w 2057162"/>
+                <a:gd name="connsiteY1" fmla="*/ 775321 h 1690341"/>
+                <a:gd name="connsiteX2" fmla="*/ 2057162 w 2057162"/>
+                <a:gd name="connsiteY2" fmla="*/ 1690341 h 1690341"/>
+                <a:gd name="connsiteX3" fmla="*/ 2057162 w 2057162"/>
+                <a:gd name="connsiteY3" fmla="*/ 1690341 h 1690341"/>
+                <a:gd name="connsiteX4" fmla="*/ 0 w 2057162"/>
+                <a:gd name="connsiteY4" fmla="*/ 1690341 h 1690341"/>
+                <a:gd name="connsiteX5" fmla="*/ 0 w 2057162"/>
+                <a:gd name="connsiteY5" fmla="*/ 1690341 h 1690341"/>
+                <a:gd name="connsiteX6" fmla="*/ 0 w 2057162"/>
+                <a:gd name="connsiteY6" fmla="*/ 845171 h 1690341"/>
+                <a:gd name="connsiteX7" fmla="*/ 845171 w 2057162"/>
+                <a:gd name="connsiteY7" fmla="*/ 0 h 1690341"/>
+                <a:gd name="connsiteX0" fmla="*/ 845171 w 2057162"/>
+                <a:gd name="connsiteY0" fmla="*/ 0 h 1690341"/>
+                <a:gd name="connsiteX1" fmla="*/ 1828565 w 2057162"/>
+                <a:gd name="connsiteY1" fmla="*/ 775321 h 1690341"/>
+                <a:gd name="connsiteX2" fmla="*/ 2057162 w 2057162"/>
+                <a:gd name="connsiteY2" fmla="*/ 1690341 h 1690341"/>
+                <a:gd name="connsiteX3" fmla="*/ 2057162 w 2057162"/>
+                <a:gd name="connsiteY3" fmla="*/ 1690341 h 1690341"/>
+                <a:gd name="connsiteX4" fmla="*/ 0 w 2057162"/>
+                <a:gd name="connsiteY4" fmla="*/ 1690341 h 1690341"/>
+                <a:gd name="connsiteX5" fmla="*/ 0 w 2057162"/>
+                <a:gd name="connsiteY5" fmla="*/ 1690341 h 1690341"/>
+                <a:gd name="connsiteX6" fmla="*/ 0 w 2057162"/>
+                <a:gd name="connsiteY6" fmla="*/ 845171 h 1690341"/>
+                <a:gd name="connsiteX7" fmla="*/ 845171 w 2057162"/>
+                <a:gd name="connsiteY7" fmla="*/ 0 h 1690341"/>
+                <a:gd name="connsiteX0" fmla="*/ 845171 w 2057162"/>
+                <a:gd name="connsiteY0" fmla="*/ 0 h 1690341"/>
+                <a:gd name="connsiteX1" fmla="*/ 1720614 w 2057162"/>
+                <a:gd name="connsiteY1" fmla="*/ 794371 h 1690341"/>
+                <a:gd name="connsiteX2" fmla="*/ 2057162 w 2057162"/>
+                <a:gd name="connsiteY2" fmla="*/ 1690341 h 1690341"/>
+                <a:gd name="connsiteX3" fmla="*/ 2057162 w 2057162"/>
+                <a:gd name="connsiteY3" fmla="*/ 1690341 h 1690341"/>
+                <a:gd name="connsiteX4" fmla="*/ 0 w 2057162"/>
+                <a:gd name="connsiteY4" fmla="*/ 1690341 h 1690341"/>
+                <a:gd name="connsiteX5" fmla="*/ 0 w 2057162"/>
+                <a:gd name="connsiteY5" fmla="*/ 1690341 h 1690341"/>
+                <a:gd name="connsiteX6" fmla="*/ 0 w 2057162"/>
+                <a:gd name="connsiteY6" fmla="*/ 845171 h 1690341"/>
+                <a:gd name="connsiteX7" fmla="*/ 845171 w 2057162"/>
+                <a:gd name="connsiteY7" fmla="*/ 0 h 1690341"/>
+                <a:gd name="connsiteX0" fmla="*/ 845171 w 2057162"/>
+                <a:gd name="connsiteY0" fmla="*/ 0 h 1690341"/>
+                <a:gd name="connsiteX1" fmla="*/ 1720614 w 2057162"/>
+                <a:gd name="connsiteY1" fmla="*/ 794371 h 1690341"/>
+                <a:gd name="connsiteX2" fmla="*/ 2057162 w 2057162"/>
+                <a:gd name="connsiteY2" fmla="*/ 1690341 h 1690341"/>
+                <a:gd name="connsiteX3" fmla="*/ 2057162 w 2057162"/>
+                <a:gd name="connsiteY3" fmla="*/ 1690341 h 1690341"/>
+                <a:gd name="connsiteX4" fmla="*/ 0 w 2057162"/>
+                <a:gd name="connsiteY4" fmla="*/ 1690341 h 1690341"/>
+                <a:gd name="connsiteX5" fmla="*/ 0 w 2057162"/>
+                <a:gd name="connsiteY5" fmla="*/ 1690341 h 1690341"/>
+                <a:gd name="connsiteX6" fmla="*/ 0 w 2057162"/>
+                <a:gd name="connsiteY6" fmla="*/ 845171 h 1690341"/>
+                <a:gd name="connsiteX7" fmla="*/ 845171 w 2057162"/>
+                <a:gd name="connsiteY7" fmla="*/ 0 h 1690341"/>
+                <a:gd name="connsiteX0" fmla="*/ 845171 w 2057162"/>
+                <a:gd name="connsiteY0" fmla="*/ 0 h 1690341"/>
+                <a:gd name="connsiteX1" fmla="*/ 1720614 w 2057162"/>
+                <a:gd name="connsiteY1" fmla="*/ 794371 h 1690341"/>
+                <a:gd name="connsiteX2" fmla="*/ 2057162 w 2057162"/>
+                <a:gd name="connsiteY2" fmla="*/ 1690341 h 1690341"/>
+                <a:gd name="connsiteX3" fmla="*/ 2057162 w 2057162"/>
+                <a:gd name="connsiteY3" fmla="*/ 1690341 h 1690341"/>
+                <a:gd name="connsiteX4" fmla="*/ 0 w 2057162"/>
+                <a:gd name="connsiteY4" fmla="*/ 1690341 h 1690341"/>
+                <a:gd name="connsiteX5" fmla="*/ 0 w 2057162"/>
+                <a:gd name="connsiteY5" fmla="*/ 1690341 h 1690341"/>
+                <a:gd name="connsiteX6" fmla="*/ 0 w 2057162"/>
+                <a:gd name="connsiteY6" fmla="*/ 845171 h 1690341"/>
+                <a:gd name="connsiteX7" fmla="*/ 845171 w 2057162"/>
+                <a:gd name="connsiteY7" fmla="*/ 0 h 1690341"/>
+                <a:gd name="connsiteX0" fmla="*/ 845171 w 2076413"/>
+                <a:gd name="connsiteY0" fmla="*/ 0 h 1690341"/>
+                <a:gd name="connsiteX1" fmla="*/ 1720614 w 2076413"/>
+                <a:gd name="connsiteY1" fmla="*/ 794371 h 1690341"/>
+                <a:gd name="connsiteX2" fmla="*/ 2057162 w 2076413"/>
+                <a:gd name="connsiteY2" fmla="*/ 1690341 h 1690341"/>
+                <a:gd name="connsiteX3" fmla="*/ 2057162 w 2076413"/>
+                <a:gd name="connsiteY3" fmla="*/ 1690341 h 1690341"/>
+                <a:gd name="connsiteX4" fmla="*/ 0 w 2076413"/>
+                <a:gd name="connsiteY4" fmla="*/ 1690341 h 1690341"/>
+                <a:gd name="connsiteX5" fmla="*/ 0 w 2076413"/>
+                <a:gd name="connsiteY5" fmla="*/ 1690341 h 1690341"/>
+                <a:gd name="connsiteX6" fmla="*/ 0 w 2076413"/>
+                <a:gd name="connsiteY6" fmla="*/ 845171 h 1690341"/>
+                <a:gd name="connsiteX7" fmla="*/ 845171 w 2076413"/>
+                <a:gd name="connsiteY7" fmla="*/ 0 h 1690341"/>
+                <a:gd name="connsiteX0" fmla="*/ 845171 w 2060529"/>
+                <a:gd name="connsiteY0" fmla="*/ 0 h 1690341"/>
+                <a:gd name="connsiteX1" fmla="*/ 1720614 w 2060529"/>
+                <a:gd name="connsiteY1" fmla="*/ 794371 h 1690341"/>
+                <a:gd name="connsiteX2" fmla="*/ 2057162 w 2060529"/>
+                <a:gd name="connsiteY2" fmla="*/ 1690341 h 1690341"/>
+                <a:gd name="connsiteX3" fmla="*/ 2057162 w 2060529"/>
+                <a:gd name="connsiteY3" fmla="*/ 1690341 h 1690341"/>
+                <a:gd name="connsiteX4" fmla="*/ 0 w 2060529"/>
+                <a:gd name="connsiteY4" fmla="*/ 1690341 h 1690341"/>
+                <a:gd name="connsiteX5" fmla="*/ 0 w 2060529"/>
+                <a:gd name="connsiteY5" fmla="*/ 1690341 h 1690341"/>
+                <a:gd name="connsiteX6" fmla="*/ 0 w 2060529"/>
+                <a:gd name="connsiteY6" fmla="*/ 845171 h 1690341"/>
+                <a:gd name="connsiteX7" fmla="*/ 845171 w 2060529"/>
+                <a:gd name="connsiteY7" fmla="*/ 0 h 1690341"/>
+              </a:gdLst>
+              <a:ahLst/>
+              <a:cxnLst>
+                <a:cxn ang="0">
+                  <a:pos x="connsiteX0" y="connsiteY0"/>
+                </a:cxn>
+                <a:cxn ang="0">
+                  <a:pos x="connsiteX1" y="connsiteY1"/>
+                </a:cxn>
+                <a:cxn ang="0">
+                  <a:pos x="connsiteX2" y="connsiteY2"/>
+                </a:cxn>
+                <a:cxn ang="0">
+                  <a:pos x="connsiteX3" y="connsiteY3"/>
+                </a:cxn>
+                <a:cxn ang="0">
+                  <a:pos x="connsiteX4" y="connsiteY4"/>
+                </a:cxn>
+                <a:cxn ang="0">
+                  <a:pos x="connsiteX5" y="connsiteY5"/>
+                </a:cxn>
+                <a:cxn ang="0">
+                  <a:pos x="connsiteX6" y="connsiteY6"/>
+                </a:cxn>
+                <a:cxn ang="0">
+                  <a:pos x="connsiteX7" y="connsiteY7"/>
+                </a:cxn>
+              </a:cxnLst>
+              <a:rect l="l" t="t" r="r" b="b"/>
+              <a:pathLst>
+                <a:path w="2060529" h="1690341">
+                  <a:moveTo>
+                    <a:pt x="845171" y="0"/>
+                  </a:moveTo>
+                  <a:cubicBezTo>
+                    <a:pt x="1188031" y="0"/>
+                    <a:pt x="1758076" y="368026"/>
+                    <a:pt x="1720614" y="794371"/>
+                  </a:cubicBezTo>
+                  <a:cubicBezTo>
+                    <a:pt x="1690731" y="1134464"/>
+                    <a:pt x="2101614" y="1103818"/>
+                    <a:pt x="2057162" y="1690341"/>
+                  </a:cubicBezTo>
+                  <a:lnTo>
+                    <a:pt x="2057162" y="1690341"/>
+                  </a:lnTo>
+                  <a:lnTo>
+                    <a:pt x="0" y="1690341"/>
+                  </a:lnTo>
+                  <a:lnTo>
+                    <a:pt x="0" y="1690341"/>
+                  </a:lnTo>
+                  <a:lnTo>
+                    <a:pt x="0" y="845171"/>
+                  </a:lnTo>
+                  <a:cubicBezTo>
+                    <a:pt x="0" y="378396"/>
+                    <a:pt x="378396" y="0"/>
+                    <a:pt x="845171" y="0"/>
+                  </a:cubicBezTo>
+                  <a:close/>
+                </a:path>
+              </a:pathLst>
+            </a:custGeom>
+            <a:noFill/>
+            <a:ln w="155575">
+              <a:solidFill>
+                <a:srgbClr val="F78535"/>
+              </a:solidFill>
+            </a:ln>
+          </p:spPr>
+          <p:style>
+            <a:lnRef idx="2">
+              <a:schemeClr val="accent1">
+                <a:shade val="15000"/>
+              </a:schemeClr>
+            </a:lnRef>
+            <a:fillRef idx="1">
+              <a:schemeClr val="accent1"/>
+            </a:fillRef>
+            <a:effectRef idx="0">
+              <a:schemeClr val="accent1"/>
+            </a:effectRef>
+            <a:fontRef idx="minor">
+              <a:schemeClr val="lt1"/>
+            </a:fontRef>
+          </p:style>
+          <p:txBody>
+            <a:bodyPr rtlCol="0" anchor="ctr"/>
+            <a:lstStyle/>
+            <a:p>
+              <a:pPr algn="ctr"/>
+              <a:endParaRPr lang="ko-KR" altLang="en-US"/>
+            </a:p>
+          </p:txBody>
+        </p:sp>
+        <p:sp>
+          <p:nvSpPr>
+            <p:cNvPr id="17" name="직사각형 16">
+              <a:extLst>
+                <a:ext uri="{FF2B5EF4-FFF2-40B4-BE49-F238E27FC236}">
+                  <a16:creationId xmlns:a16="http://schemas.microsoft.com/office/drawing/2014/main" id="{A28DC8C0-2FF8-E143-4155-B41C479C1233}"/>
+                </a:ext>
+              </a:extLst>
+            </p:cNvPr>
+            <p:cNvSpPr/>
+            <p:nvPr/>
+          </p:nvSpPr>
+          <p:spPr>
+            <a:xfrm>
+              <a:off x="2933512" y="4314667"/>
+              <a:ext cx="623943" cy="590550"/>
+            </a:xfrm>
+            <a:prstGeom prst="rect">
+              <a:avLst/>
+            </a:prstGeom>
+            <a:solidFill>
+              <a:schemeClr val="bg1"/>
+            </a:solidFill>
+            <a:ln>
+              <a:noFill/>
+            </a:ln>
+          </p:spPr>
+          <p:style>
+            <a:lnRef idx="2">
+              <a:schemeClr val="accent1">
+                <a:shade val="15000"/>
+              </a:schemeClr>
+            </a:lnRef>
+            <a:fillRef idx="1">
+              <a:schemeClr val="accent1"/>
+            </a:fillRef>
+            <a:effectRef idx="0">
+              <a:schemeClr val="accent1"/>
+            </a:effectRef>
+            <a:fontRef idx="minor">
+              <a:schemeClr val="lt1"/>
+            </a:fontRef>
+          </p:style>
+          <p:txBody>
+            <a:bodyPr rtlCol="0" anchor="ctr"/>
+            <a:lstStyle/>
+            <a:p>
+              <a:pPr algn="ctr"/>
+              <a:endParaRPr lang="ko-KR" altLang="en-US"/>
+            </a:p>
+          </p:txBody>
+        </p:sp>
+        <p:sp>
+          <p:nvSpPr>
+            <p:cNvPr id="4" name="사각형: 둥근 모서리 3">
+              <a:extLst>
+                <a:ext uri="{FF2B5EF4-FFF2-40B4-BE49-F238E27FC236}">
+                  <a16:creationId xmlns:a16="http://schemas.microsoft.com/office/drawing/2014/main" id="{0B8EB592-203F-B88B-9CE7-6F5393873112}"/>
+                </a:ext>
+              </a:extLst>
+            </p:cNvPr>
+            <p:cNvSpPr/>
+            <p:nvPr/>
+          </p:nvSpPr>
+          <p:spPr>
+            <a:xfrm>
+              <a:off x="2950061" y="3693776"/>
+              <a:ext cx="517039" cy="172122"/>
+            </a:xfrm>
+            <a:prstGeom prst="roundRect">
+              <a:avLst>
+                <a:gd name="adj" fmla="val 50000"/>
+              </a:avLst>
+            </a:prstGeom>
+            <a:solidFill>
+              <a:srgbClr val="2A2A2A"/>
+            </a:solidFill>
+            <a:ln>
+              <a:noFill/>
+            </a:ln>
+          </p:spPr>
+          <p:style>
+            <a:lnRef idx="2">
+              <a:schemeClr val="accent1">
+                <a:shade val="15000"/>
+              </a:schemeClr>
+            </a:lnRef>
+            <a:fillRef idx="1">
+              <a:schemeClr val="accent1"/>
+            </a:fillRef>
+            <a:effectRef idx="0">
+              <a:schemeClr val="accent1"/>
+            </a:effectRef>
+            <a:fontRef idx="minor">
+              <a:schemeClr val="lt1"/>
+            </a:fontRef>
+          </p:style>
+          <p:txBody>
+            <a:bodyPr rtlCol="0" anchor="ctr"/>
+            <a:lstStyle/>
+            <a:p>
+              <a:pPr algn="ctr"/>
+              <a:endParaRPr lang="ko-KR" altLang="en-US"/>
+            </a:p>
+          </p:txBody>
+        </p:sp>
+        <p:sp>
+          <p:nvSpPr>
+            <p:cNvPr id="5" name="사각형: 둥근 모서리 4">
+              <a:extLst>
+                <a:ext uri="{FF2B5EF4-FFF2-40B4-BE49-F238E27FC236}">
+                  <a16:creationId xmlns:a16="http://schemas.microsoft.com/office/drawing/2014/main" id="{D8CEB347-E4C6-8E0B-CE61-9F2E0D878CD2}"/>
+                </a:ext>
+              </a:extLst>
+            </p:cNvPr>
+            <p:cNvSpPr/>
+            <p:nvPr/>
+          </p:nvSpPr>
+          <p:spPr>
+            <a:xfrm>
+              <a:off x="2950061" y="3089293"/>
+              <a:ext cx="689833" cy="166371"/>
+            </a:xfrm>
+            <a:prstGeom prst="roundRect">
+              <a:avLst>
+                <a:gd name="adj" fmla="val 50000"/>
+              </a:avLst>
+            </a:prstGeom>
+            <a:solidFill>
+              <a:srgbClr val="2A2A2A"/>
+            </a:solidFill>
+            <a:ln>
+              <a:noFill/>
+            </a:ln>
+          </p:spPr>
+          <p:style>
+            <a:lnRef idx="2">
+              <a:schemeClr val="accent1">
+                <a:shade val="15000"/>
+              </a:schemeClr>
+            </a:lnRef>
+            <a:fillRef idx="1">
+              <a:schemeClr val="accent1"/>
+            </a:fillRef>
+            <a:effectRef idx="0">
+              <a:schemeClr val="accent1"/>
+            </a:effectRef>
+            <a:fontRef idx="minor">
+              <a:schemeClr val="lt1"/>
+            </a:fontRef>
+          </p:style>
+          <p:txBody>
+            <a:bodyPr rtlCol="0" anchor="ctr"/>
+            <a:lstStyle/>
+            <a:p>
+              <a:pPr algn="ctr"/>
+              <a:endParaRPr lang="ko-KR" altLang="en-US"/>
+            </a:p>
+          </p:txBody>
+        </p:sp>
+        <p:sp>
+          <p:nvSpPr>
+            <p:cNvPr id="6" name="막힌 원호 5">
+              <a:extLst>
+                <a:ext uri="{FF2B5EF4-FFF2-40B4-BE49-F238E27FC236}">
+                  <a16:creationId xmlns:a16="http://schemas.microsoft.com/office/drawing/2014/main" id="{A3323CC9-86B6-D03E-52B3-B8224F88B190}"/>
+                </a:ext>
+              </a:extLst>
+            </p:cNvPr>
+            <p:cNvSpPr/>
+            <p:nvPr/>
+          </p:nvSpPr>
+          <p:spPr>
+            <a:xfrm rot="5400000">
+              <a:off x="3025775" y="3089293"/>
+              <a:ext cx="942975" cy="942975"/>
+            </a:xfrm>
+            <a:prstGeom prst="blockArc">
+              <a:avLst>
+                <a:gd name="adj1" fmla="val 10800000"/>
+                <a:gd name="adj2" fmla="val 5"/>
+                <a:gd name="adj3" fmla="val 16583"/>
+              </a:avLst>
+            </a:prstGeom>
+            <a:solidFill>
+              <a:srgbClr val="2A2A2A"/>
+            </a:solidFill>
+            <a:ln>
+              <a:noFill/>
+            </a:ln>
+          </p:spPr>
+          <p:style>
+            <a:lnRef idx="2">
+              <a:schemeClr val="accent1">
+                <a:shade val="15000"/>
+              </a:schemeClr>
+            </a:lnRef>
+            <a:fillRef idx="1">
+              <a:schemeClr val="accent1"/>
+            </a:fillRef>
+            <a:effectRef idx="0">
+              <a:schemeClr val="accent1"/>
+            </a:effectRef>
+            <a:fontRef idx="minor">
+              <a:schemeClr val="lt1"/>
+            </a:fontRef>
+          </p:style>
+          <p:txBody>
+            <a:bodyPr rtlCol="0" anchor="ctr"/>
+            <a:lstStyle/>
+            <a:p>
+              <a:pPr algn="ctr"/>
+              <a:endParaRPr lang="ko-KR" altLang="en-US"/>
+            </a:p>
+          </p:txBody>
+        </p:sp>
+        <p:sp>
+          <p:nvSpPr>
+            <p:cNvPr id="7" name="사각형: 둥근 모서리 6">
+              <a:extLst>
+                <a:ext uri="{FF2B5EF4-FFF2-40B4-BE49-F238E27FC236}">
+                  <a16:creationId xmlns:a16="http://schemas.microsoft.com/office/drawing/2014/main" id="{E8A96BEA-7A62-F878-8E8E-5AD92F12AA00}"/>
+                </a:ext>
+              </a:extLst>
+            </p:cNvPr>
+            <p:cNvSpPr/>
+            <p:nvPr/>
+          </p:nvSpPr>
+          <p:spPr>
+            <a:xfrm rot="16200000">
+              <a:off x="3166633" y="4139535"/>
+              <a:ext cx="689833" cy="166371"/>
+            </a:xfrm>
+            <a:prstGeom prst="roundRect">
+              <a:avLst>
+                <a:gd name="adj" fmla="val 50000"/>
+              </a:avLst>
+            </a:prstGeom>
+            <a:solidFill>
+              <a:srgbClr val="2A2A2A"/>
+            </a:solidFill>
+            <a:ln>
+              <a:noFill/>
+            </a:ln>
+          </p:spPr>
+          <p:style>
+            <a:lnRef idx="2">
+              <a:schemeClr val="accent1">
+                <a:shade val="15000"/>
+              </a:schemeClr>
+            </a:lnRef>
+            <a:fillRef idx="1">
+              <a:schemeClr val="accent1"/>
+            </a:fillRef>
+            <a:effectRef idx="0">
+              <a:schemeClr val="accent1"/>
+            </a:effectRef>
+            <a:fontRef idx="minor">
+              <a:schemeClr val="lt1"/>
+            </a:fontRef>
+          </p:style>
+          <p:txBody>
+            <a:bodyPr rtlCol="0" anchor="ctr"/>
+            <a:lstStyle/>
+            <a:p>
+              <a:pPr algn="ctr"/>
+              <a:endParaRPr lang="ko-KR" altLang="en-US"/>
+            </a:p>
+          </p:txBody>
+        </p:sp>
+        <p:sp>
+          <p:nvSpPr>
+            <p:cNvPr id="10" name="자유형: 도형 9">
+              <a:extLst>
+                <a:ext uri="{FF2B5EF4-FFF2-40B4-BE49-F238E27FC236}">
+                  <a16:creationId xmlns:a16="http://schemas.microsoft.com/office/drawing/2014/main" id="{33D5C7E1-1C8A-04AD-0C7C-8EAACD6BC4FD}"/>
+                </a:ext>
+              </a:extLst>
+            </p:cNvPr>
+            <p:cNvSpPr/>
+            <p:nvPr/>
+          </p:nvSpPr>
+          <p:spPr>
+            <a:xfrm rot="9900000">
+              <a:off x="3161817" y="4463208"/>
+              <a:ext cx="470478" cy="346860"/>
+            </a:xfrm>
+            <a:custGeom>
+              <a:avLst/>
+              <a:gdLst>
+                <a:gd name="connsiteX0" fmla="*/ 143999 w 470478"/>
+                <a:gd name="connsiteY0" fmla="*/ 346860 h 346860"/>
+                <a:gd name="connsiteX1" fmla="*/ 0 w 470478"/>
+                <a:gd name="connsiteY1" fmla="*/ 284743 h 346860"/>
+                <a:gd name="connsiteX2" fmla="*/ 470478 w 470478"/>
+                <a:gd name="connsiteY2" fmla="*/ 1506 h 346860"/>
+                <a:gd name="connsiteX3" fmla="*/ 467948 w 470478"/>
+                <a:gd name="connsiteY3" fmla="*/ 33168 h 346860"/>
+                <a:gd name="connsiteX4" fmla="*/ 434047 w 470478"/>
+                <a:gd name="connsiteY4" fmla="*/ 159687 h 346860"/>
+                <a:gd name="connsiteX5" fmla="*/ 359756 w 470478"/>
+                <a:gd name="connsiteY5" fmla="*/ 165439 h 346860"/>
+                <a:gd name="connsiteX6" fmla="*/ 143999 w 470478"/>
+                <a:gd name="connsiteY6" fmla="*/ 346860 h 346860"/>
+              </a:gdLst>
+              <a:ahLst/>
+              <a:cxnLst>
+                <a:cxn ang="0">
+                  <a:pos x="connsiteX0" y="connsiteY0"/>
+                </a:cxn>
+                <a:cxn ang="0">
+                  <a:pos x="connsiteX1" y="connsiteY1"/>
+                </a:cxn>
+                <a:cxn ang="0">
+                  <a:pos x="connsiteX2" y="connsiteY2"/>
+                </a:cxn>
+                <a:cxn ang="0">
+                  <a:pos x="connsiteX3" y="connsiteY3"/>
+                </a:cxn>
+                <a:cxn ang="0">
+                  <a:pos x="connsiteX4" y="connsiteY4"/>
+                </a:cxn>
+                <a:cxn ang="0">
+                  <a:pos x="connsiteX5" y="connsiteY5"/>
+                </a:cxn>
+                <a:cxn ang="0">
+                  <a:pos x="connsiteX6" y="connsiteY6"/>
+                </a:cxn>
+              </a:cxnLst>
+              <a:rect l="l" t="t" r="r" b="b"/>
+              <a:pathLst>
+                <a:path w="470478" h="346860">
+                  <a:moveTo>
+                    <a:pt x="143999" y="346860"/>
+                  </a:moveTo>
+                  <a:lnTo>
+                    <a:pt x="0" y="284743"/>
+                  </a:lnTo>
+                  <a:cubicBezTo>
+                    <a:pt x="79987" y="99319"/>
+                    <a:pt x="269178" y="-14578"/>
+                    <a:pt x="470478" y="1506"/>
+                  </a:cubicBezTo>
+                  <a:lnTo>
+                    <a:pt x="467948" y="33168"/>
+                  </a:lnTo>
+                  <a:lnTo>
+                    <a:pt x="434047" y="159687"/>
+                  </a:lnTo>
+                  <a:lnTo>
+                    <a:pt x="359756" y="165439"/>
+                  </a:lnTo>
+                  <a:cubicBezTo>
+                    <a:pt x="265067" y="188089"/>
+                    <a:pt x="184035" y="254049"/>
+                    <a:pt x="143999" y="346860"/>
+                  </a:cubicBezTo>
+                  <a:close/>
+                </a:path>
+              </a:pathLst>
+            </a:custGeom>
+            <a:solidFill>
+              <a:srgbClr val="2A2A2A"/>
+            </a:solidFill>
+            <a:ln>
+              <a:noFill/>
+            </a:ln>
+          </p:spPr>
+          <p:style>
+            <a:lnRef idx="2">
+              <a:schemeClr val="accent1">
+                <a:shade val="15000"/>
+              </a:schemeClr>
+            </a:lnRef>
+            <a:fillRef idx="1">
+              <a:schemeClr val="accent1"/>
+            </a:fillRef>
+            <a:effectRef idx="0">
+              <a:schemeClr val="accent1"/>
+            </a:effectRef>
+            <a:fontRef idx="minor">
+              <a:schemeClr val="lt1"/>
+            </a:fontRef>
+          </p:style>
+          <p:txBody>
+            <a:bodyPr wrap="square" rtlCol="0" anchor="ctr">
+              <a:noAutofit/>
+            </a:bodyPr>
+            <a:lstStyle/>
+            <a:p>
+              <a:pPr algn="ctr"/>
+              <a:endParaRPr lang="ko-KR" altLang="en-US"/>
+            </a:p>
+          </p:txBody>
+        </p:sp>
+        <p:grpSp>
+          <p:nvGrpSpPr>
+            <p:cNvPr id="15" name="그룹 14">
+              <a:extLst>
+                <a:ext uri="{FF2B5EF4-FFF2-40B4-BE49-F238E27FC236}">
+                  <a16:creationId xmlns:a16="http://schemas.microsoft.com/office/drawing/2014/main" id="{2A4ADFF2-C407-080F-CCB2-F2506BF563B1}"/>
+                </a:ext>
+              </a:extLst>
+            </p:cNvPr>
+            <p:cNvGrpSpPr/>
+            <p:nvPr/>
+          </p:nvGrpSpPr>
+          <p:grpSpPr>
+            <a:xfrm>
+              <a:off x="2950061" y="3089292"/>
+              <a:ext cx="1018689" cy="1720775"/>
+              <a:chOff x="2950061" y="3089292"/>
+              <a:chExt cx="1018689" cy="1720775"/>
+            </a:xfrm>
+          </p:grpSpPr>
+          <p:sp>
+            <p:nvSpPr>
+              <p:cNvPr id="3" name="사각형: 둥근 모서리 2">
+                <a:extLst>
+                  <a:ext uri="{FF2B5EF4-FFF2-40B4-BE49-F238E27FC236}">
+                    <a16:creationId xmlns:a16="http://schemas.microsoft.com/office/drawing/2014/main" id="{1A139300-F706-0345-2717-79C0A1AF2E37}"/>
+                  </a:ext>
+                </a:extLst>
+              </p:cNvPr>
+              <p:cNvSpPr/>
+              <p:nvPr/>
+            </p:nvSpPr>
+            <p:spPr>
+              <a:xfrm>
+                <a:off x="2950061" y="3388659"/>
+                <a:ext cx="623943" cy="172122"/>
+              </a:xfrm>
+              <a:prstGeom prst="roundRect">
+                <a:avLst>
+                  <a:gd name="adj" fmla="val 50000"/>
+                </a:avLst>
+              </a:prstGeom>
+              <a:solidFill>
+                <a:srgbClr val="2A2A2A"/>
+              </a:solidFill>
+              <a:ln>
+                <a:noFill/>
+              </a:ln>
+            </p:spPr>
+            <p:style>
+              <a:lnRef idx="2">
+                <a:schemeClr val="accent1">
+                  <a:shade val="15000"/>
+                </a:schemeClr>
+              </a:lnRef>
+              <a:fillRef idx="1">
+                <a:schemeClr val="accent1"/>
+              </a:fillRef>
+              <a:effectRef idx="0">
+                <a:schemeClr val="accent1"/>
+              </a:effectRef>
+              <a:fontRef idx="minor">
+                <a:schemeClr val="lt1"/>
+              </a:fontRef>
+            </p:style>
+            <p:txBody>
+              <a:bodyPr rtlCol="0" anchor="ctr"/>
+              <a:lstStyle/>
+              <a:p>
+                <a:pPr algn="ctr"/>
+                <a:endParaRPr lang="ko-KR" altLang="en-US"/>
+              </a:p>
+            </p:txBody>
+          </p:sp>
+          <p:sp>
+            <p:nvSpPr>
+              <p:cNvPr id="11" name="사각형: 둥근 모서리 10">
+                <a:extLst>
+                  <a:ext uri="{FF2B5EF4-FFF2-40B4-BE49-F238E27FC236}">
+                    <a16:creationId xmlns:a16="http://schemas.microsoft.com/office/drawing/2014/main" id="{6884425D-6A5B-9F81-09D3-B8E42C7A3EDF}"/>
+                  </a:ext>
+                </a:extLst>
+              </p:cNvPr>
+              <p:cNvSpPr/>
+              <p:nvPr/>
+            </p:nvSpPr>
+            <p:spPr>
+              <a:xfrm>
+                <a:off x="2950061" y="3693775"/>
+                <a:ext cx="517039" cy="172122"/>
+              </a:xfrm>
+              <a:prstGeom prst="roundRect">
+                <a:avLst>
+                  <a:gd name="adj" fmla="val 50000"/>
+                </a:avLst>
+              </a:prstGeom>
+              <a:solidFill>
+                <a:srgbClr val="2A2A2A"/>
+              </a:solidFill>
+              <a:ln>
+                <a:noFill/>
+              </a:ln>
+            </p:spPr>
+            <p:style>
+              <a:lnRef idx="2">
+                <a:schemeClr val="accent1">
+                  <a:shade val="15000"/>
+                </a:schemeClr>
+              </a:lnRef>
+              <a:fillRef idx="1">
+                <a:schemeClr val="accent1"/>
+              </a:fillRef>
+              <a:effectRef idx="0">
+                <a:schemeClr val="accent1"/>
+              </a:effectRef>
+              <a:fontRef idx="minor">
+                <a:schemeClr val="lt1"/>
+              </a:fontRef>
+            </p:style>
+            <p:txBody>
+              <a:bodyPr rtlCol="0" anchor="ctr"/>
+              <a:lstStyle/>
+              <a:p>
+                <a:pPr algn="ctr"/>
+                <a:endParaRPr lang="ko-KR" altLang="en-US"/>
+              </a:p>
+            </p:txBody>
+          </p:sp>
+          <p:sp>
+            <p:nvSpPr>
+              <p:cNvPr id="12" name="막힌 원호 11">
+                <a:extLst>
+                  <a:ext uri="{FF2B5EF4-FFF2-40B4-BE49-F238E27FC236}">
+                    <a16:creationId xmlns:a16="http://schemas.microsoft.com/office/drawing/2014/main" id="{43DAB68B-AF5A-1E0C-FB9A-903B0C634D18}"/>
+                  </a:ext>
+                </a:extLst>
+              </p:cNvPr>
+              <p:cNvSpPr/>
+              <p:nvPr/>
+            </p:nvSpPr>
+            <p:spPr>
+              <a:xfrm rot="5400000">
+                <a:off x="3025775" y="3089292"/>
+                <a:ext cx="942975" cy="942975"/>
+              </a:xfrm>
+              <a:prstGeom prst="blockArc">
+                <a:avLst>
+                  <a:gd name="adj1" fmla="val 10800000"/>
+                  <a:gd name="adj2" fmla="val 5"/>
+                  <a:gd name="adj3" fmla="val 16583"/>
+                </a:avLst>
+              </a:prstGeom>
+              <a:solidFill>
+                <a:srgbClr val="2A2A2A"/>
+              </a:solidFill>
+              <a:ln>
+                <a:noFill/>
+              </a:ln>
+            </p:spPr>
+            <p:style>
+              <a:lnRef idx="2">
+                <a:schemeClr val="accent1">
+                  <a:shade val="15000"/>
+                </a:schemeClr>
+              </a:lnRef>
+              <a:fillRef idx="1">
+                <a:schemeClr val="accent1"/>
+              </a:fillRef>
+              <a:effectRef idx="0">
+                <a:schemeClr val="accent1"/>
+              </a:effectRef>
+              <a:fontRef idx="minor">
+                <a:schemeClr val="lt1"/>
+              </a:fontRef>
+            </p:style>
+            <p:txBody>
+              <a:bodyPr rtlCol="0" anchor="ctr"/>
+              <a:lstStyle/>
+              <a:p>
+                <a:pPr algn="ctr"/>
+                <a:endParaRPr lang="ko-KR" altLang="en-US"/>
+              </a:p>
+            </p:txBody>
+          </p:sp>
+          <p:sp>
+            <p:nvSpPr>
+              <p:cNvPr id="13" name="사각형: 둥근 모서리 12">
+                <a:extLst>
+                  <a:ext uri="{FF2B5EF4-FFF2-40B4-BE49-F238E27FC236}">
+                    <a16:creationId xmlns:a16="http://schemas.microsoft.com/office/drawing/2014/main" id="{D47549E7-905A-A66A-7349-44F8F0C59C66}"/>
+                  </a:ext>
+                </a:extLst>
+              </p:cNvPr>
+              <p:cNvSpPr/>
+              <p:nvPr/>
+            </p:nvSpPr>
+            <p:spPr>
+              <a:xfrm rot="16200000">
+                <a:off x="3166633" y="4139534"/>
+                <a:ext cx="689833" cy="166371"/>
+              </a:xfrm>
+              <a:prstGeom prst="roundRect">
+                <a:avLst>
+                  <a:gd name="adj" fmla="val 50000"/>
+                </a:avLst>
+              </a:prstGeom>
+              <a:solidFill>
+                <a:srgbClr val="2A2A2A"/>
+              </a:solidFill>
+              <a:ln>
+                <a:noFill/>
+              </a:ln>
+            </p:spPr>
+            <p:style>
+              <a:lnRef idx="2">
+                <a:schemeClr val="accent1">
+                  <a:shade val="15000"/>
+                </a:schemeClr>
+              </a:lnRef>
+              <a:fillRef idx="1">
+                <a:schemeClr val="accent1"/>
+              </a:fillRef>
+              <a:effectRef idx="0">
+                <a:schemeClr val="accent1"/>
+              </a:effectRef>
+              <a:fontRef idx="minor">
+                <a:schemeClr val="lt1"/>
+              </a:fontRef>
+            </p:style>
+            <p:txBody>
+              <a:bodyPr rtlCol="0" anchor="ctr"/>
+              <a:lstStyle/>
+              <a:p>
+                <a:pPr algn="ctr"/>
+                <a:endParaRPr lang="ko-KR" altLang="en-US"/>
+              </a:p>
+            </p:txBody>
+          </p:sp>
+          <p:sp>
+            <p:nvSpPr>
+              <p:cNvPr id="14" name="자유형: 도형 13">
+                <a:extLst>
+                  <a:ext uri="{FF2B5EF4-FFF2-40B4-BE49-F238E27FC236}">
+                    <a16:creationId xmlns:a16="http://schemas.microsoft.com/office/drawing/2014/main" id="{387A23AD-E4DC-8778-1D77-6BB98AB3740E}"/>
+                  </a:ext>
+                </a:extLst>
+              </p:cNvPr>
+              <p:cNvSpPr/>
+              <p:nvPr/>
+            </p:nvSpPr>
+            <p:spPr>
+              <a:xfrm rot="9900000">
+                <a:off x="3161817" y="4463207"/>
+                <a:ext cx="470478" cy="346860"/>
+              </a:xfrm>
+              <a:custGeom>
+                <a:avLst/>
+                <a:gdLst>
+                  <a:gd name="connsiteX0" fmla="*/ 143999 w 470478"/>
+                  <a:gd name="connsiteY0" fmla="*/ 346860 h 346860"/>
+                  <a:gd name="connsiteX1" fmla="*/ 0 w 470478"/>
+                  <a:gd name="connsiteY1" fmla="*/ 284743 h 346860"/>
+                  <a:gd name="connsiteX2" fmla="*/ 470478 w 470478"/>
+                  <a:gd name="connsiteY2" fmla="*/ 1506 h 346860"/>
+                  <a:gd name="connsiteX3" fmla="*/ 467948 w 470478"/>
+                  <a:gd name="connsiteY3" fmla="*/ 33168 h 346860"/>
+                  <a:gd name="connsiteX4" fmla="*/ 434047 w 470478"/>
+                  <a:gd name="connsiteY4" fmla="*/ 159687 h 346860"/>
+                  <a:gd name="connsiteX5" fmla="*/ 359756 w 470478"/>
+                  <a:gd name="connsiteY5" fmla="*/ 165439 h 346860"/>
+                  <a:gd name="connsiteX6" fmla="*/ 143999 w 470478"/>
+                  <a:gd name="connsiteY6" fmla="*/ 346860 h 346860"/>
+                </a:gdLst>
+                <a:ahLst/>
+                <a:cxnLst>
+                  <a:cxn ang="0">
+                    <a:pos x="connsiteX0" y="connsiteY0"/>
+                  </a:cxn>
+                  <a:cxn ang="0">
+                    <a:pos x="connsiteX1" y="connsiteY1"/>
+                  </a:cxn>
+                  <a:cxn ang="0">
+                    <a:pos x="connsiteX2" y="connsiteY2"/>
+                  </a:cxn>
+                  <a:cxn ang="0">
+                    <a:pos x="connsiteX3" y="connsiteY3"/>
+                  </a:cxn>
+                  <a:cxn ang="0">
+                    <a:pos x="connsiteX4" y="connsiteY4"/>
+                  </a:cxn>
+                  <a:cxn ang="0">
+                    <a:pos x="connsiteX5" y="connsiteY5"/>
+                  </a:cxn>
+                  <a:cxn ang="0">
+                    <a:pos x="connsiteX6" y="connsiteY6"/>
+                  </a:cxn>
+                </a:cxnLst>
+                <a:rect l="l" t="t" r="r" b="b"/>
+                <a:pathLst>
+                  <a:path w="470478" h="346860">
+                    <a:moveTo>
+                      <a:pt x="143999" y="346860"/>
+                    </a:moveTo>
+                    <a:lnTo>
+                      <a:pt x="0" y="284743"/>
+                    </a:lnTo>
+                    <a:cubicBezTo>
+                      <a:pt x="79987" y="99319"/>
+                      <a:pt x="269178" y="-14578"/>
+                      <a:pt x="470478" y="1506"/>
+                    </a:cubicBezTo>
+                    <a:lnTo>
+                      <a:pt x="467948" y="33168"/>
+                    </a:lnTo>
+                    <a:lnTo>
+                      <a:pt x="434047" y="159687"/>
+                    </a:lnTo>
+                    <a:lnTo>
+                      <a:pt x="359756" y="165439"/>
+                    </a:lnTo>
+                    <a:cubicBezTo>
+                      <a:pt x="265067" y="188089"/>
+                      <a:pt x="184035" y="254049"/>
+                      <a:pt x="143999" y="346860"/>
+                    </a:cubicBezTo>
+                    <a:close/>
+                  </a:path>
+                </a:pathLst>
+              </a:custGeom>
+              <a:solidFill>
+                <a:srgbClr val="2A2A2A"/>
+              </a:solidFill>
+              <a:ln>
+                <a:noFill/>
+              </a:ln>
+            </p:spPr>
+            <p:style>
+              <a:lnRef idx="2">
+                <a:schemeClr val="accent1">
+                  <a:shade val="15000"/>
+                </a:schemeClr>
+              </a:lnRef>
+              <a:fillRef idx="1">
+                <a:schemeClr val="accent1"/>
+              </a:fillRef>
+              <a:effectRef idx="0">
+                <a:schemeClr val="accent1"/>
+              </a:effectRef>
+              <a:fontRef idx="minor">
+                <a:schemeClr val="lt1"/>
+              </a:fontRef>
+            </p:style>
+            <p:txBody>
+              <a:bodyPr wrap="square" rtlCol="0" anchor="ctr">
+                <a:noAutofit/>
+              </a:bodyPr>
+              <a:lstStyle/>
+              <a:p>
+                <a:pPr algn="ctr"/>
+                <a:endParaRPr lang="ko-KR" altLang="en-US"/>
+              </a:p>
+            </p:txBody>
+          </p:sp>
+        </p:grpSp>
+      </p:grpSp>
+      <p:grpSp>
+        <p:nvGrpSpPr>
+          <p:cNvPr id="44" name="그룹 43">
+            <a:extLst>
+              <a:ext uri="{FF2B5EF4-FFF2-40B4-BE49-F238E27FC236}">
+                <a16:creationId xmlns:a16="http://schemas.microsoft.com/office/drawing/2014/main" id="{B5F5C428-D084-41A9-C913-7AC31914DD85}"/>
+              </a:ext>
+            </a:extLst>
+          </p:cNvPr>
+          <p:cNvGrpSpPr/>
+          <p:nvPr/>
+        </p:nvGrpSpPr>
+        <p:grpSpPr>
+          <a:xfrm>
+            <a:off x="-1057948" y="6115050"/>
+            <a:ext cx="221033" cy="314122"/>
+            <a:chOff x="2990177" y="3971925"/>
+            <a:chExt cx="221033" cy="314122"/>
+          </a:xfrm>
+        </p:grpSpPr>
+        <p:sp>
+          <p:nvSpPr>
+            <p:cNvPr id="24" name="사각형: 둥근 모서리 23">
+              <a:extLst>
+                <a:ext uri="{FF2B5EF4-FFF2-40B4-BE49-F238E27FC236}">
+                  <a16:creationId xmlns:a16="http://schemas.microsoft.com/office/drawing/2014/main" id="{E2C4A678-E4BA-E6A2-93C8-27F529CA1C32}"/>
+                </a:ext>
+              </a:extLst>
+            </p:cNvPr>
+            <p:cNvSpPr/>
+            <p:nvPr/>
+          </p:nvSpPr>
+          <p:spPr>
+            <a:xfrm>
+              <a:off x="2990177" y="3971925"/>
+              <a:ext cx="73819" cy="314122"/>
+            </a:xfrm>
+            <a:prstGeom prst="roundRect">
+              <a:avLst>
+                <a:gd name="adj" fmla="val 50000"/>
+              </a:avLst>
+            </a:prstGeom>
+          </p:spPr>
+          <p:style>
+            <a:lnRef idx="2">
+              <a:schemeClr val="accent1">
+                <a:shade val="15000"/>
+              </a:schemeClr>
+            </a:lnRef>
+            <a:fillRef idx="1">
+              <a:schemeClr val="accent1"/>
+            </a:fillRef>
+            <a:effectRef idx="0">
+              <a:schemeClr val="accent1"/>
+            </a:effectRef>
+            <a:fontRef idx="minor">
+              <a:schemeClr val="lt1"/>
+            </a:fontRef>
+          </p:style>
+          <p:txBody>
+            <a:bodyPr rtlCol="0" anchor="ctr"/>
+            <a:lstStyle/>
+            <a:p>
+              <a:pPr algn="ctr"/>
+              <a:endParaRPr lang="ko-KR" altLang="en-US" dirty="0"/>
+            </a:p>
+          </p:txBody>
+        </p:sp>
+        <p:sp>
+          <p:nvSpPr>
+            <p:cNvPr id="25" name="사각형: 둥근 모서리 24">
+              <a:extLst>
+                <a:ext uri="{FF2B5EF4-FFF2-40B4-BE49-F238E27FC236}">
+                  <a16:creationId xmlns:a16="http://schemas.microsoft.com/office/drawing/2014/main" id="{AF421E05-C4CD-C5F7-F403-51A813FF886B}"/>
+                </a:ext>
+              </a:extLst>
+            </p:cNvPr>
+            <p:cNvSpPr/>
+            <p:nvPr/>
+          </p:nvSpPr>
+          <p:spPr>
+            <a:xfrm>
+              <a:off x="3137391" y="3971925"/>
+              <a:ext cx="73819" cy="314122"/>
+            </a:xfrm>
+            <a:prstGeom prst="roundRect">
+              <a:avLst>
+                <a:gd name="adj" fmla="val 50000"/>
+              </a:avLst>
+            </a:prstGeom>
+          </p:spPr>
+          <p:style>
+            <a:lnRef idx="2">
+              <a:schemeClr val="accent1">
+                <a:shade val="15000"/>
+              </a:schemeClr>
+            </a:lnRef>
+            <a:fillRef idx="1">
+              <a:schemeClr val="accent1"/>
+            </a:fillRef>
+            <a:effectRef idx="0">
+              <a:schemeClr val="accent1"/>
+            </a:effectRef>
+            <a:fontRef idx="minor">
+              <a:schemeClr val="lt1"/>
+            </a:fontRef>
+          </p:style>
+          <p:txBody>
+            <a:bodyPr rtlCol="0" anchor="ctr"/>
+            <a:lstStyle/>
+            <a:p>
+              <a:pPr algn="ctr"/>
+              <a:endParaRPr lang="ko-KR" altLang="en-US"/>
+            </a:p>
+          </p:txBody>
+        </p:sp>
+      </p:grpSp>
+      <p:grpSp>
+        <p:nvGrpSpPr>
+          <p:cNvPr id="43" name="그룹 42">
+            <a:extLst>
+              <a:ext uri="{FF2B5EF4-FFF2-40B4-BE49-F238E27FC236}">
+                <a16:creationId xmlns:a16="http://schemas.microsoft.com/office/drawing/2014/main" id="{42B4C5B1-F1B8-9C3D-ABC8-8C1DFA0B908E}"/>
+              </a:ext>
+            </a:extLst>
+          </p:cNvPr>
+          <p:cNvGrpSpPr/>
+          <p:nvPr/>
+        </p:nvGrpSpPr>
+        <p:grpSpPr>
+          <a:xfrm>
+            <a:off x="11326466" y="3455557"/>
+            <a:ext cx="342936" cy="879279"/>
+            <a:chOff x="2583353" y="3971924"/>
+            <a:chExt cx="342936" cy="879279"/>
+          </a:xfrm>
+        </p:grpSpPr>
+        <p:sp>
+          <p:nvSpPr>
+            <p:cNvPr id="38" name="자유형: 도형 37">
+              <a:extLst>
+                <a:ext uri="{FF2B5EF4-FFF2-40B4-BE49-F238E27FC236}">
+                  <a16:creationId xmlns:a16="http://schemas.microsoft.com/office/drawing/2014/main" id="{D13F0960-812A-4744-4EFA-EB15959A2129}"/>
+                </a:ext>
+              </a:extLst>
+            </p:cNvPr>
+            <p:cNvSpPr/>
+            <p:nvPr/>
+          </p:nvSpPr>
+          <p:spPr>
+            <a:xfrm flipV="1">
+              <a:off x="2583353" y="4062071"/>
+              <a:ext cx="342900" cy="436452"/>
+            </a:xfrm>
+            <a:custGeom>
+              <a:avLst/>
+              <a:gdLst>
+                <a:gd name="connsiteX0" fmla="*/ 0 w 342900"/>
+                <a:gd name="connsiteY0" fmla="*/ 436452 h 436452"/>
+                <a:gd name="connsiteX1" fmla="*/ 63990 w 342900"/>
+                <a:gd name="connsiteY1" fmla="*/ 436452 h 436452"/>
+                <a:gd name="connsiteX2" fmla="*/ 63990 w 342900"/>
+                <a:gd name="connsiteY2" fmla="*/ 246329 h 436452"/>
+                <a:gd name="connsiteX3" fmla="*/ 97843 w 342900"/>
+                <a:gd name="connsiteY3" fmla="*/ 212476 h 436452"/>
+                <a:gd name="connsiteX4" fmla="*/ 131696 w 342900"/>
+                <a:gd name="connsiteY4" fmla="*/ 246329 h 436452"/>
+                <a:gd name="connsiteX5" fmla="*/ 131696 w 342900"/>
+                <a:gd name="connsiteY5" fmla="*/ 436452 h 436452"/>
+                <a:gd name="connsiteX6" fmla="*/ 211204 w 342900"/>
+                <a:gd name="connsiteY6" fmla="*/ 436452 h 436452"/>
+                <a:gd name="connsiteX7" fmla="*/ 211204 w 342900"/>
+                <a:gd name="connsiteY7" fmla="*/ 246329 h 436452"/>
+                <a:gd name="connsiteX8" fmla="*/ 245057 w 342900"/>
+                <a:gd name="connsiteY8" fmla="*/ 212476 h 436452"/>
+                <a:gd name="connsiteX9" fmla="*/ 278910 w 342900"/>
+                <a:gd name="connsiteY9" fmla="*/ 246329 h 436452"/>
+                <a:gd name="connsiteX10" fmla="*/ 278910 w 342900"/>
+                <a:gd name="connsiteY10" fmla="*/ 436452 h 436452"/>
+                <a:gd name="connsiteX11" fmla="*/ 342900 w 342900"/>
+                <a:gd name="connsiteY11" fmla="*/ 436452 h 436452"/>
+                <a:gd name="connsiteX12" fmla="*/ 342900 w 342900"/>
+                <a:gd name="connsiteY12" fmla="*/ 171450 h 436452"/>
+                <a:gd name="connsiteX13" fmla="*/ 171450 w 342900"/>
+                <a:gd name="connsiteY13" fmla="*/ 0 h 436452"/>
+                <a:gd name="connsiteX14" fmla="*/ 0 w 342900"/>
+                <a:gd name="connsiteY14" fmla="*/ 171450 h 436452"/>
+              </a:gdLst>
+              <a:ahLst/>
+              <a:cxnLst>
+                <a:cxn ang="0">
+                  <a:pos x="connsiteX0" y="connsiteY0"/>
+                </a:cxn>
+                <a:cxn ang="0">
+                  <a:pos x="connsiteX1" y="connsiteY1"/>
+                </a:cxn>
+                <a:cxn ang="0">
+                  <a:pos x="connsiteX2" y="connsiteY2"/>
+                </a:cxn>
+                <a:cxn ang="0">
+                  <a:pos x="connsiteX3" y="connsiteY3"/>
+                </a:cxn>
+                <a:cxn ang="0">
+                  <a:pos x="connsiteX4" y="connsiteY4"/>
+                </a:cxn>
+                <a:cxn ang="0">
+                  <a:pos x="connsiteX5" y="connsiteY5"/>
+                </a:cxn>
+                <a:cxn ang="0">
+                  <a:pos x="connsiteX6" y="connsiteY6"/>
+                </a:cxn>
+                <a:cxn ang="0">
+                  <a:pos x="connsiteX7" y="connsiteY7"/>
+                </a:cxn>
+                <a:cxn ang="0">
+                  <a:pos x="connsiteX8" y="connsiteY8"/>
+                </a:cxn>
+                <a:cxn ang="0">
+                  <a:pos x="connsiteX9" y="connsiteY9"/>
+                </a:cxn>
+                <a:cxn ang="0">
+                  <a:pos x="connsiteX10" y="connsiteY10"/>
+                </a:cxn>
+                <a:cxn ang="0">
+                  <a:pos x="connsiteX11" y="connsiteY11"/>
+                </a:cxn>
+                <a:cxn ang="0">
+                  <a:pos x="connsiteX12" y="connsiteY12"/>
+                </a:cxn>
+                <a:cxn ang="0">
+                  <a:pos x="connsiteX13" y="connsiteY13"/>
+                </a:cxn>
+                <a:cxn ang="0">
+                  <a:pos x="connsiteX14" y="connsiteY14"/>
+                </a:cxn>
+              </a:cxnLst>
+              <a:rect l="l" t="t" r="r" b="b"/>
+              <a:pathLst>
+                <a:path w="342900" h="436452">
+                  <a:moveTo>
+                    <a:pt x="0" y="436452"/>
+                  </a:moveTo>
+                  <a:lnTo>
+                    <a:pt x="63990" y="436452"/>
+                  </a:lnTo>
+                  <a:lnTo>
+                    <a:pt x="63990" y="246329"/>
+                  </a:lnTo>
+                  <a:cubicBezTo>
+                    <a:pt x="63990" y="227633"/>
+                    <a:pt x="79147" y="212476"/>
+                    <a:pt x="97843" y="212476"/>
+                  </a:cubicBezTo>
+                  <a:cubicBezTo>
+                    <a:pt x="116539" y="212476"/>
+                    <a:pt x="131696" y="227633"/>
+                    <a:pt x="131696" y="246329"/>
+                  </a:cubicBezTo>
+                  <a:lnTo>
+                    <a:pt x="131696" y="436452"/>
+                  </a:lnTo>
+                  <a:lnTo>
+                    <a:pt x="211204" y="436452"/>
+                  </a:lnTo>
+                  <a:lnTo>
+                    <a:pt x="211204" y="246329"/>
+                  </a:lnTo>
+                  <a:cubicBezTo>
+                    <a:pt x="211204" y="227633"/>
+                    <a:pt x="226361" y="212476"/>
+                    <a:pt x="245057" y="212476"/>
+                  </a:cubicBezTo>
+                  <a:cubicBezTo>
+                    <a:pt x="263753" y="212476"/>
+                    <a:pt x="278910" y="227633"/>
+                    <a:pt x="278910" y="246329"/>
+                  </a:cubicBezTo>
+                  <a:lnTo>
+                    <a:pt x="278910" y="436452"/>
+                  </a:lnTo>
+                  <a:lnTo>
+                    <a:pt x="342900" y="436452"/>
+                  </a:lnTo>
+                  <a:lnTo>
+                    <a:pt x="342900" y="171450"/>
+                  </a:lnTo>
+                  <a:cubicBezTo>
+                    <a:pt x="342900" y="76761"/>
+                    <a:pt x="266139" y="0"/>
+                    <a:pt x="171450" y="0"/>
+                  </a:cubicBezTo>
+                  <a:cubicBezTo>
+                    <a:pt x="76761" y="0"/>
+                    <a:pt x="0" y="76761"/>
+                    <a:pt x="0" y="171450"/>
+                  </a:cubicBezTo>
+                  <a:close/>
+                </a:path>
+              </a:pathLst>
+            </a:custGeom>
+            <a:solidFill>
+              <a:srgbClr val="9A8B80"/>
+            </a:solidFill>
+            <a:ln>
+              <a:noFill/>
+            </a:ln>
+          </p:spPr>
+          <p:style>
+            <a:lnRef idx="2">
+              <a:schemeClr val="accent1">
+                <a:shade val="15000"/>
+              </a:schemeClr>
+            </a:lnRef>
+            <a:fillRef idx="1">
+              <a:schemeClr val="accent1"/>
+            </a:fillRef>
+            <a:effectRef idx="0">
+              <a:schemeClr val="accent1"/>
+            </a:effectRef>
+            <a:fontRef idx="minor">
+              <a:schemeClr val="lt1"/>
+            </a:fontRef>
+          </p:style>
+          <p:txBody>
+            <a:bodyPr wrap="square" rtlCol="0" anchor="ctr">
+              <a:noAutofit/>
+            </a:bodyPr>
+            <a:lstStyle/>
+            <a:p>
+              <a:pPr algn="ctr"/>
+              <a:endParaRPr lang="ko-KR" altLang="en-US"/>
+            </a:p>
+          </p:txBody>
+        </p:sp>
+        <p:sp>
+          <p:nvSpPr>
+            <p:cNvPr id="20" name="직사각형 19">
+              <a:extLst>
+                <a:ext uri="{FF2B5EF4-FFF2-40B4-BE49-F238E27FC236}">
+                  <a16:creationId xmlns:a16="http://schemas.microsoft.com/office/drawing/2014/main" id="{6C40505B-5328-0FC7-32A1-BFB04A9D38F3}"/>
+                </a:ext>
+              </a:extLst>
+            </p:cNvPr>
+            <p:cNvSpPr/>
+            <p:nvPr/>
+          </p:nvSpPr>
+          <p:spPr>
+            <a:xfrm>
+              <a:off x="2680207" y="4442223"/>
+              <a:ext cx="149192" cy="408980"/>
+            </a:xfrm>
+            <a:custGeom>
+              <a:avLst/>
+              <a:gdLst>
+                <a:gd name="connsiteX0" fmla="*/ 0 w 133350"/>
+                <a:gd name="connsiteY0" fmla="*/ 0 h 383484"/>
+                <a:gd name="connsiteX1" fmla="*/ 133350 w 133350"/>
+                <a:gd name="connsiteY1" fmla="*/ 0 h 383484"/>
+                <a:gd name="connsiteX2" fmla="*/ 133350 w 133350"/>
+                <a:gd name="connsiteY2" fmla="*/ 383484 h 383484"/>
+                <a:gd name="connsiteX3" fmla="*/ 0 w 133350"/>
+                <a:gd name="connsiteY3" fmla="*/ 383484 h 383484"/>
+                <a:gd name="connsiteX4" fmla="*/ 0 w 133350"/>
+                <a:gd name="connsiteY4" fmla="*/ 0 h 383484"/>
+                <a:gd name="connsiteX0" fmla="*/ 19229 w 152579"/>
+                <a:gd name="connsiteY0" fmla="*/ 45508 h 428992"/>
+                <a:gd name="connsiteX1" fmla="*/ 152579 w 152579"/>
+                <a:gd name="connsiteY1" fmla="*/ 45508 h 428992"/>
+                <a:gd name="connsiteX2" fmla="*/ 152579 w 152579"/>
+                <a:gd name="connsiteY2" fmla="*/ 428992 h 428992"/>
+                <a:gd name="connsiteX3" fmla="*/ 19229 w 152579"/>
+                <a:gd name="connsiteY3" fmla="*/ 428992 h 428992"/>
+                <a:gd name="connsiteX4" fmla="*/ 19229 w 152579"/>
+                <a:gd name="connsiteY4" fmla="*/ 45508 h 428992"/>
+                <a:gd name="connsiteX0" fmla="*/ 19652 w 148239"/>
+                <a:gd name="connsiteY0" fmla="*/ 57053 h 404818"/>
+                <a:gd name="connsiteX1" fmla="*/ 148239 w 148239"/>
+                <a:gd name="connsiteY1" fmla="*/ 21334 h 404818"/>
+                <a:gd name="connsiteX2" fmla="*/ 148239 w 148239"/>
+                <a:gd name="connsiteY2" fmla="*/ 404818 h 404818"/>
+                <a:gd name="connsiteX3" fmla="*/ 14889 w 148239"/>
+                <a:gd name="connsiteY3" fmla="*/ 404818 h 404818"/>
+                <a:gd name="connsiteX4" fmla="*/ 19652 w 148239"/>
+                <a:gd name="connsiteY4" fmla="*/ 57053 h 404818"/>
+                <a:gd name="connsiteX0" fmla="*/ 13831 w 149192"/>
+                <a:gd name="connsiteY0" fmla="*/ 72422 h 420187"/>
+                <a:gd name="connsiteX1" fmla="*/ 142418 w 149192"/>
+                <a:gd name="connsiteY1" fmla="*/ 36703 h 420187"/>
+                <a:gd name="connsiteX2" fmla="*/ 142418 w 149192"/>
+                <a:gd name="connsiteY2" fmla="*/ 420187 h 420187"/>
+                <a:gd name="connsiteX3" fmla="*/ 9068 w 149192"/>
+                <a:gd name="connsiteY3" fmla="*/ 420187 h 420187"/>
+                <a:gd name="connsiteX4" fmla="*/ 13831 w 149192"/>
+                <a:gd name="connsiteY4" fmla="*/ 72422 h 420187"/>
+                <a:gd name="connsiteX0" fmla="*/ 13831 w 149192"/>
+                <a:gd name="connsiteY0" fmla="*/ 61215 h 408980"/>
+                <a:gd name="connsiteX1" fmla="*/ 142418 w 149192"/>
+                <a:gd name="connsiteY1" fmla="*/ 49309 h 408980"/>
+                <a:gd name="connsiteX2" fmla="*/ 142418 w 149192"/>
+                <a:gd name="connsiteY2" fmla="*/ 408980 h 408980"/>
+                <a:gd name="connsiteX3" fmla="*/ 9068 w 149192"/>
+                <a:gd name="connsiteY3" fmla="*/ 408980 h 408980"/>
+                <a:gd name="connsiteX4" fmla="*/ 13831 w 149192"/>
+                <a:gd name="connsiteY4" fmla="*/ 61215 h 408980"/>
+              </a:gdLst>
+              <a:ahLst/>
+              <a:cxnLst>
+                <a:cxn ang="0">
+                  <a:pos x="connsiteX0" y="connsiteY0"/>
+                </a:cxn>
+                <a:cxn ang="0">
+                  <a:pos x="connsiteX1" y="connsiteY1"/>
+                </a:cxn>
+                <a:cxn ang="0">
+                  <a:pos x="connsiteX2" y="connsiteY2"/>
+                </a:cxn>
+                <a:cxn ang="0">
+                  <a:pos x="connsiteX3" y="connsiteY3"/>
+                </a:cxn>
+                <a:cxn ang="0">
+                  <a:pos x="connsiteX4" y="connsiteY4"/>
+                </a:cxn>
+              </a:cxnLst>
+              <a:rect l="l" t="t" r="r" b="b"/>
+              <a:pathLst>
+                <a:path w="149192" h="408980">
+                  <a:moveTo>
+                    <a:pt x="13831" y="61215"/>
+                  </a:moveTo>
+                  <a:cubicBezTo>
+                    <a:pt x="-60782" y="-41179"/>
+                    <a:pt x="193218" y="6447"/>
+                    <a:pt x="142418" y="49309"/>
+                  </a:cubicBezTo>
+                  <a:lnTo>
+                    <a:pt x="142418" y="408980"/>
+                  </a:lnTo>
+                  <a:lnTo>
+                    <a:pt x="9068" y="408980"/>
+                  </a:lnTo>
+                  <a:cubicBezTo>
+                    <a:pt x="10656" y="293058"/>
+                    <a:pt x="12243" y="177137"/>
+                    <a:pt x="13831" y="61215"/>
+                  </a:cubicBezTo>
+                  <a:close/>
+                </a:path>
+              </a:pathLst>
+            </a:custGeom>
+            <a:solidFill>
+              <a:srgbClr val="9A8B80"/>
+            </a:solidFill>
+            <a:ln>
+              <a:noFill/>
+            </a:ln>
+          </p:spPr>
+          <p:style>
+            <a:lnRef idx="2">
+              <a:schemeClr val="accent1">
+                <a:shade val="15000"/>
+              </a:schemeClr>
+            </a:lnRef>
+            <a:fillRef idx="1">
+              <a:schemeClr val="accent1"/>
+            </a:fillRef>
+            <a:effectRef idx="0">
+              <a:schemeClr val="accent1"/>
+            </a:effectRef>
+            <a:fontRef idx="minor">
+              <a:schemeClr val="lt1"/>
+            </a:fontRef>
+          </p:style>
+          <p:txBody>
+            <a:bodyPr rtlCol="0" anchor="ctr"/>
+            <a:lstStyle/>
+            <a:p>
+              <a:pPr algn="ctr"/>
+              <a:endParaRPr lang="ko-KR" altLang="en-US"/>
+            </a:p>
+          </p:txBody>
+        </p:sp>
+        <p:sp>
+          <p:nvSpPr>
+            <p:cNvPr id="36" name="사각형: 둥근 모서리 35">
+              <a:extLst>
+                <a:ext uri="{FF2B5EF4-FFF2-40B4-BE49-F238E27FC236}">
+                  <a16:creationId xmlns:a16="http://schemas.microsoft.com/office/drawing/2014/main" id="{C29D28D2-F4B1-05E5-AF00-34D915288C39}"/>
+                </a:ext>
+              </a:extLst>
+            </p:cNvPr>
+            <p:cNvSpPr/>
+            <p:nvPr/>
+          </p:nvSpPr>
+          <p:spPr>
+            <a:xfrm>
+              <a:off x="2583353" y="3971925"/>
+              <a:ext cx="68614" cy="314122"/>
+            </a:xfrm>
+            <a:prstGeom prst="roundRect">
+              <a:avLst>
+                <a:gd name="adj" fmla="val 50000"/>
+              </a:avLst>
+            </a:prstGeom>
+            <a:solidFill>
+              <a:srgbClr val="9A8B80"/>
+            </a:solidFill>
+            <a:ln>
+              <a:noFill/>
+            </a:ln>
+          </p:spPr>
+          <p:style>
+            <a:lnRef idx="2">
+              <a:schemeClr val="accent1">
+                <a:shade val="15000"/>
+              </a:schemeClr>
+            </a:lnRef>
+            <a:fillRef idx="1">
+              <a:schemeClr val="accent1"/>
+            </a:fillRef>
+            <a:effectRef idx="0">
+              <a:schemeClr val="accent1"/>
+            </a:effectRef>
+            <a:fontRef idx="minor">
+              <a:schemeClr val="lt1"/>
+            </a:fontRef>
+          </p:style>
+          <p:txBody>
+            <a:bodyPr wrap="square" rtlCol="0" anchor="ctr">
+              <a:noAutofit/>
+            </a:bodyPr>
+            <a:lstStyle/>
+            <a:p>
+              <a:pPr algn="ctr"/>
+              <a:endParaRPr lang="ko-KR" altLang="en-US" dirty="0"/>
+            </a:p>
+          </p:txBody>
+        </p:sp>
+        <p:sp>
+          <p:nvSpPr>
+            <p:cNvPr id="39" name="사각형: 둥근 모서리 38">
+              <a:extLst>
+                <a:ext uri="{FF2B5EF4-FFF2-40B4-BE49-F238E27FC236}">
+                  <a16:creationId xmlns:a16="http://schemas.microsoft.com/office/drawing/2014/main" id="{1BC276D2-45B5-A60C-BC6E-2DDB6E92D948}"/>
+                </a:ext>
+              </a:extLst>
+            </p:cNvPr>
+            <p:cNvSpPr/>
+            <p:nvPr/>
+          </p:nvSpPr>
+          <p:spPr>
+            <a:xfrm>
+              <a:off x="2857675" y="3971924"/>
+              <a:ext cx="68614" cy="366713"/>
+            </a:xfrm>
+            <a:prstGeom prst="roundRect">
+              <a:avLst>
+                <a:gd name="adj" fmla="val 50000"/>
+              </a:avLst>
+            </a:prstGeom>
+            <a:solidFill>
+              <a:srgbClr val="9A8B80"/>
+            </a:solidFill>
+            <a:ln>
+              <a:noFill/>
+            </a:ln>
+          </p:spPr>
+          <p:style>
+            <a:lnRef idx="2">
+              <a:schemeClr val="accent1">
+                <a:shade val="15000"/>
+              </a:schemeClr>
+            </a:lnRef>
+            <a:fillRef idx="1">
+              <a:schemeClr val="accent1"/>
+            </a:fillRef>
+            <a:effectRef idx="0">
+              <a:schemeClr val="accent1"/>
+            </a:effectRef>
+            <a:fontRef idx="minor">
+              <a:schemeClr val="lt1"/>
+            </a:fontRef>
+          </p:style>
+          <p:txBody>
+            <a:bodyPr wrap="square" rtlCol="0" anchor="ctr">
+              <a:noAutofit/>
+            </a:bodyPr>
+            <a:lstStyle/>
+            <a:p>
+              <a:pPr algn="ctr"/>
+              <a:endParaRPr lang="ko-KR" altLang="en-US" dirty="0"/>
+            </a:p>
+          </p:txBody>
+        </p:sp>
+        <p:sp>
+          <p:nvSpPr>
+            <p:cNvPr id="40" name="사각형: 둥근 모서리 39">
+              <a:extLst>
+                <a:ext uri="{FF2B5EF4-FFF2-40B4-BE49-F238E27FC236}">
+                  <a16:creationId xmlns:a16="http://schemas.microsoft.com/office/drawing/2014/main" id="{B4095305-3F5C-3266-5383-F56D6DE8D66F}"/>
+                </a:ext>
+              </a:extLst>
+            </p:cNvPr>
+            <p:cNvSpPr/>
+            <p:nvPr/>
+          </p:nvSpPr>
+          <p:spPr>
+            <a:xfrm>
+              <a:off x="2712771" y="3971924"/>
+              <a:ext cx="81016" cy="366713"/>
+            </a:xfrm>
+            <a:prstGeom prst="roundRect">
+              <a:avLst>
+                <a:gd name="adj" fmla="val 50000"/>
+              </a:avLst>
+            </a:prstGeom>
+            <a:solidFill>
+              <a:srgbClr val="9A8B80"/>
+            </a:solidFill>
+            <a:ln>
+              <a:noFill/>
+            </a:ln>
+          </p:spPr>
+          <p:style>
+            <a:lnRef idx="2">
+              <a:schemeClr val="accent1">
+                <a:shade val="15000"/>
+              </a:schemeClr>
+            </a:lnRef>
+            <a:fillRef idx="1">
+              <a:schemeClr val="accent1"/>
+            </a:fillRef>
+            <a:effectRef idx="0">
+              <a:schemeClr val="accent1"/>
+            </a:effectRef>
+            <a:fontRef idx="minor">
+              <a:schemeClr val="lt1"/>
+            </a:fontRef>
+          </p:style>
+          <p:txBody>
+            <a:bodyPr wrap="square" rtlCol="0" anchor="ctr">
+              <a:noAutofit/>
+            </a:bodyPr>
+            <a:lstStyle/>
+            <a:p>
+              <a:pPr algn="ctr"/>
+              <a:endParaRPr lang="ko-KR" altLang="en-US" dirty="0"/>
+            </a:p>
+          </p:txBody>
+        </p:sp>
+      </p:grpSp>
+      <p:sp>
+        <p:nvSpPr>
+          <p:cNvPr id="46" name="직사각형 45">
+            <a:extLst>
+              <a:ext uri="{FF2B5EF4-FFF2-40B4-BE49-F238E27FC236}">
+                <a16:creationId xmlns:a16="http://schemas.microsoft.com/office/drawing/2014/main" id="{AD51756A-FC3B-6738-5611-5B0E8267FEAF}"/>
+              </a:ext>
+            </a:extLst>
+          </p:cNvPr>
+          <p:cNvSpPr/>
+          <p:nvPr/>
+        </p:nvSpPr>
+        <p:spPr>
+          <a:xfrm>
+            <a:off x="12975789" y="2299700"/>
+            <a:ext cx="1886857" cy="849088"/>
+          </a:xfrm>
+          <a:prstGeom prst="rect">
+            <a:avLst/>
+          </a:prstGeom>
+          <a:noFill/>
+          <a:ln>
+            <a:noFill/>
+          </a:ln>
+        </p:spPr>
+        <p:style>
+          <a:lnRef idx="2">
+            <a:schemeClr val="accent1">
+              <a:shade val="15000"/>
+            </a:schemeClr>
+          </a:lnRef>
+          <a:fillRef idx="1">
+            <a:schemeClr val="accent1"/>
+          </a:fillRef>
+          <a:effectRef idx="0">
+            <a:schemeClr val="accent1"/>
+          </a:effectRef>
+          <a:fontRef idx="minor">
+            <a:schemeClr val="lt1"/>
+          </a:fontRef>
+        </p:style>
+        <p:txBody>
+          <a:bodyPr rtlCol="0" anchor="ctr"/>
+          <a:lstStyle/>
+          <a:p>
+            <a:pPr algn="dist"/>
+            <a:r>
+              <a:rPr lang="en-US" altLang="ko-KR" sz="4800" b="1" dirty="0">
+                <a:solidFill>
+                  <a:schemeClr val="tx1"/>
+                </a:solidFill>
+              </a:rPr>
+              <a:t>DEEP</a:t>
+            </a:r>
+          </a:p>
+        </p:txBody>
+      </p:sp>
+      <p:sp>
+        <p:nvSpPr>
+          <p:cNvPr id="47" name="직사각형 46">
+            <a:extLst>
+              <a:ext uri="{FF2B5EF4-FFF2-40B4-BE49-F238E27FC236}">
+                <a16:creationId xmlns:a16="http://schemas.microsoft.com/office/drawing/2014/main" id="{CCE8583F-842F-5E00-B207-5D9B8798BDF7}"/>
+              </a:ext>
+            </a:extLst>
+          </p:cNvPr>
+          <p:cNvSpPr/>
+          <p:nvPr/>
+        </p:nvSpPr>
+        <p:spPr>
+          <a:xfrm>
+            <a:off x="12975789" y="2843485"/>
+            <a:ext cx="1886857" cy="849088"/>
+          </a:xfrm>
+          <a:prstGeom prst="rect">
+            <a:avLst/>
+          </a:prstGeom>
+          <a:noFill/>
+          <a:ln>
+            <a:noFill/>
+          </a:ln>
+        </p:spPr>
+        <p:style>
+          <a:lnRef idx="2">
+            <a:schemeClr val="accent1">
+              <a:shade val="15000"/>
+            </a:schemeClr>
+          </a:lnRef>
+          <a:fillRef idx="1">
+            <a:schemeClr val="accent1"/>
+          </a:fillRef>
+          <a:effectRef idx="0">
+            <a:schemeClr val="accent1"/>
+          </a:effectRef>
+          <a:fontRef idx="minor">
+            <a:schemeClr val="lt1"/>
+          </a:fontRef>
+        </p:style>
+        <p:txBody>
+          <a:bodyPr rtlCol="0" anchor="ctr"/>
+          <a:lstStyle/>
+          <a:p>
+            <a:pPr algn="dist"/>
+            <a:r>
+              <a:rPr lang="en-US" altLang="ko-KR" sz="4800" b="1" dirty="0">
+                <a:solidFill>
+                  <a:schemeClr val="tx1"/>
+                </a:solidFill>
+              </a:rPr>
+              <a:t>DISH</a:t>
+            </a:r>
+          </a:p>
+        </p:txBody>
+      </p:sp>
+      <p:sp>
+        <p:nvSpPr>
+          <p:cNvPr id="48" name="직사각형 47">
+            <a:extLst>
+              <a:ext uri="{FF2B5EF4-FFF2-40B4-BE49-F238E27FC236}">
+                <a16:creationId xmlns:a16="http://schemas.microsoft.com/office/drawing/2014/main" id="{D8FA6F78-CC77-BE69-1F7F-70405E25903E}"/>
+              </a:ext>
+            </a:extLst>
+          </p:cNvPr>
+          <p:cNvSpPr/>
+          <p:nvPr/>
+        </p:nvSpPr>
+        <p:spPr>
+          <a:xfrm>
+            <a:off x="12747540" y="3692573"/>
+            <a:ext cx="2477946" cy="330076"/>
+          </a:xfrm>
+          <a:prstGeom prst="rect">
+            <a:avLst/>
+          </a:prstGeom>
+        </p:spPr>
+        <p:style>
+          <a:lnRef idx="2">
+            <a:schemeClr val="accent1">
+              <a:shade val="15000"/>
+            </a:schemeClr>
+          </a:lnRef>
+          <a:fillRef idx="1">
+            <a:schemeClr val="accent1"/>
+          </a:fillRef>
+          <a:effectRef idx="0">
+            <a:schemeClr val="accent1"/>
+          </a:effectRef>
+          <a:fontRef idx="minor">
+            <a:schemeClr val="lt1"/>
+          </a:fontRef>
+        </p:style>
+        <p:txBody>
+          <a:bodyPr rtlCol="0" anchor="ctr"/>
+          <a:lstStyle/>
+          <a:p>
+            <a:pPr algn="ctr"/>
+            <a:r>
+              <a:rPr lang="en-US" altLang="ko-KR"/>
+              <a:t>QNWP</a:t>
+            </a:r>
+            <a:endParaRPr lang="ko-KR" altLang="en-US"/>
+          </a:p>
+        </p:txBody>
+      </p:sp>
+    </p:spTree>
+    <p:extLst>
+      <p:ext uri="{BB962C8B-B14F-4D97-AF65-F5344CB8AC3E}">
+        <p14:creationId xmlns:p14="http://schemas.microsoft.com/office/powerpoint/2010/main" val="2320760667"/>
+      </p:ext>
+    </p:extLst>
+  </p:cSld>
+  <p:clrMapOvr>
+    <a:masterClrMapping/>
+  </p:clrMapOvr>
+</p:sld>
+</file>
+
+<file path=ppt/slides/slide3.xml><?xml version="1.0" encoding="utf-8"?>
 <p:sld xmlns:a="http://schemas.openxmlformats.org/drawingml/2006/main" xmlns:r="http://schemas.openxmlformats.org/officeDocument/2006/relationships" xmlns:p="http://schemas.openxmlformats.org/presentationml/2006/main">
   <p:cSld>
     <p:spTree>
@@ -4673,7 +6555,7 @@
 </p:sld>
 </file>
 
-<file path=ppt/slides/slide3.xml><?xml version="1.0" encoding="utf-8"?>
+<file path=ppt/slides/slide4.xml><?xml version="1.0" encoding="utf-8"?>
 <p:sld xmlns:a="http://schemas.openxmlformats.org/drawingml/2006/main" xmlns:r="http://schemas.openxmlformats.org/officeDocument/2006/relationships" xmlns:p="http://schemas.openxmlformats.org/presentationml/2006/main">
   <p:cSld>
     <p:spTree>
